--- a/SF03PR04 - Java Collections.pptx
+++ b/SF03PR04 - Java Collections.pptx
@@ -5,10 +5,10 @@
     <p:sldMasterId id="2147483672" r:id="rId4"/>
   </p:sldMasterIdLst>
   <p:notesMasterIdLst>
-    <p:notesMasterId r:id="rId21"/>
+    <p:notesMasterId r:id="rId39"/>
   </p:notesMasterIdLst>
   <p:handoutMasterIdLst>
-    <p:handoutMasterId r:id="rId22"/>
+    <p:handoutMasterId r:id="rId40"/>
   </p:handoutMasterIdLst>
   <p:sldIdLst>
     <p:sldId id="262" r:id="rId5"/>
@@ -25,8 +25,26 @@
     <p:sldId id="271" r:id="rId16"/>
     <p:sldId id="272" r:id="rId17"/>
     <p:sldId id="273" r:id="rId18"/>
-    <p:sldId id="274" r:id="rId19"/>
-    <p:sldId id="261" r:id="rId20"/>
+    <p:sldId id="275" r:id="rId19"/>
+    <p:sldId id="274" r:id="rId20"/>
+    <p:sldId id="276" r:id="rId21"/>
+    <p:sldId id="277" r:id="rId22"/>
+    <p:sldId id="278" r:id="rId23"/>
+    <p:sldId id="279" r:id="rId24"/>
+    <p:sldId id="280" r:id="rId25"/>
+    <p:sldId id="281" r:id="rId26"/>
+    <p:sldId id="282" r:id="rId27"/>
+    <p:sldId id="283" r:id="rId28"/>
+    <p:sldId id="284" r:id="rId29"/>
+    <p:sldId id="285" r:id="rId30"/>
+    <p:sldId id="286" r:id="rId31"/>
+    <p:sldId id="287" r:id="rId32"/>
+    <p:sldId id="288" r:id="rId33"/>
+    <p:sldId id="289" r:id="rId34"/>
+    <p:sldId id="290" r:id="rId35"/>
+    <p:sldId id="291" r:id="rId36"/>
+    <p:sldId id="292" r:id="rId37"/>
+    <p:sldId id="261" r:id="rId38"/>
   </p:sldIdLst>
   <p:sldSz cx="12192000" cy="6858000"/>
   <p:notesSz cx="6858000" cy="9144000"/>
@@ -253,7 +271,7 @@
           <a:p>
             <a:fld id="{AB567D21-D55F-4A7B-94FF-7608FD989819}" type="datetimeFigureOut">
               <a:rPr lang="it-IT" smtClean="0"/>
-              <a:t>10/07/2026</a:t>
+              <a:t>12/07/2026</a:t>
             </a:fld>
             <a:endParaRPr lang="it-IT"/>
           </a:p>
@@ -446,7 +464,7 @@
           <a:p>
             <a:fld id="{CE0B2B73-14A8-482F-9803-A95CC73B5B34}" type="datetimeFigureOut">
               <a:rPr lang="it-IT" smtClean="0"/>
-              <a:t>10/07/2026</a:t>
+              <a:t>12/07/2026</a:t>
             </a:fld>
             <a:endParaRPr lang="it-IT"/>
           </a:p>
@@ -4799,6 +4817,271 @@
         <p:cNvPr id="1" name="">
           <a:extLst>
             <a:ext uri="{FF2B5EF4-FFF2-40B4-BE49-F238E27FC236}">
+              <a16:creationId xmlns:a16="http://schemas.microsoft.com/office/drawing/2014/main" id="{935E85EE-606B-F53D-2265-0DC9291E3B27}"/>
+            </a:ext>
+          </a:extLst>
+        </p:cNvPr>
+        <p:cNvGrpSpPr/>
+        <p:nvPr/>
+      </p:nvGrpSpPr>
+      <p:grpSpPr>
+        <a:xfrm>
+          <a:off x="0" y="0"/>
+          <a:ext cx="0" cy="0"/>
+          <a:chOff x="0" y="0"/>
+          <a:chExt cx="0" cy="0"/>
+        </a:xfrm>
+      </p:grpSpPr>
+      <p:sp>
+        <p:nvSpPr>
+          <p:cNvPr id="2" name="Titolo della lezione">
+            <a:extLst>
+              <a:ext uri="{FF2B5EF4-FFF2-40B4-BE49-F238E27FC236}">
+                <a16:creationId xmlns:a16="http://schemas.microsoft.com/office/drawing/2014/main" id="{74AC8E60-A34A-D144-9E97-EE5BCDB3AAFA}"/>
+              </a:ext>
+            </a:extLst>
+          </p:cNvPr>
+          <p:cNvSpPr>
+            <a:spLocks noGrp="1"/>
+          </p:cNvSpPr>
+          <p:nvPr>
+            <p:ph type="title"/>
+          </p:nvPr>
+        </p:nvSpPr>
+        <p:spPr>
+          <a:xfrm>
+            <a:off x="838200" y="831206"/>
+            <a:ext cx="10515600" cy="314198"/>
+          </a:xfrm>
+        </p:spPr>
+        <p:txBody>
+          <a:bodyPr/>
+          <a:lstStyle/>
+          <a:p>
+            <a:r>
+              <a:rPr lang="it-IT" dirty="0"/>
+              <a:t>SLIDE 13: Esercizio Guidato – Cronometrare le Prestazioni in Laboratorio</a:t>
+            </a:r>
+          </a:p>
+        </p:txBody>
+      </p:sp>
+      <p:sp>
+        <p:nvSpPr>
+          <p:cNvPr id="3" name="Contenuto della lezione">
+            <a:extLst>
+              <a:ext uri="{FF2B5EF4-FFF2-40B4-BE49-F238E27FC236}">
+                <a16:creationId xmlns:a16="http://schemas.microsoft.com/office/drawing/2014/main" id="{C93B793A-F5CE-991B-A979-D359D52233D9}"/>
+              </a:ext>
+            </a:extLst>
+          </p:cNvPr>
+          <p:cNvSpPr>
+            <a:spLocks noGrp="1"/>
+          </p:cNvSpPr>
+          <p:nvPr>
+            <p:ph idx="1"/>
+          </p:nvPr>
+        </p:nvSpPr>
+        <p:spPr>
+          <a:xfrm>
+            <a:off x="1317319" y="1589730"/>
+            <a:ext cx="9557362" cy="4803369"/>
+          </a:xfrm>
+        </p:spPr>
+        <p:txBody>
+          <a:bodyPr/>
+          <a:lstStyle/>
+          <a:p>
+            <a:r>
+              <a:rPr lang="it-IT" dirty="0"/>
+              <a:t>Sviluppiamo l'abilità pratica di effettuare un benchmark prestazionale per toccare con mano la teoria della complessità algoritmica. </a:t>
+            </a:r>
+          </a:p>
+          <a:p>
+            <a:r>
+              <a:rPr lang="it-IT" dirty="0"/>
+              <a:t>Create un programma nel cui </a:t>
+            </a:r>
+            <a:r>
+              <a:rPr lang="it-IT" dirty="0" err="1"/>
+              <a:t>main</a:t>
+            </a:r>
+            <a:r>
+              <a:rPr lang="it-IT" dirty="0"/>
+              <a:t> vengono istanziati un </a:t>
+            </a:r>
+            <a:r>
+              <a:rPr lang="it-IT" dirty="0" err="1">
+                <a:solidFill>
+                  <a:srgbClr val="171FE2"/>
+                </a:solidFill>
+                <a:latin typeface="Consolas" panose="020B0609020204030204" pitchFamily="49" charset="0"/>
+              </a:rPr>
+              <a:t>ArrayList</a:t>
+            </a:r>
+            <a:r>
+              <a:rPr lang="it-IT" dirty="0">
+                <a:solidFill>
+                  <a:srgbClr val="171FE2"/>
+                </a:solidFill>
+                <a:latin typeface="Consolas" panose="020B0609020204030204" pitchFamily="49" charset="0"/>
+              </a:rPr>
+              <a:t>&lt;</a:t>
+            </a:r>
+            <a:r>
+              <a:rPr lang="it-IT" dirty="0" err="1">
+                <a:solidFill>
+                  <a:srgbClr val="171FE2"/>
+                </a:solidFill>
+                <a:latin typeface="Consolas" panose="020B0609020204030204" pitchFamily="49" charset="0"/>
+              </a:rPr>
+              <a:t>Integer</a:t>
+            </a:r>
+            <a:r>
+              <a:rPr lang="it-IT" dirty="0">
+                <a:solidFill>
+                  <a:srgbClr val="171FE2"/>
+                </a:solidFill>
+                <a:latin typeface="Consolas" panose="020B0609020204030204" pitchFamily="49" charset="0"/>
+              </a:rPr>
+              <a:t>&gt; </a:t>
+            </a:r>
+            <a:r>
+              <a:rPr lang="it-IT" dirty="0"/>
+              <a:t>e un </a:t>
+            </a:r>
+            <a:r>
+              <a:rPr lang="it-IT" dirty="0" err="1">
+                <a:solidFill>
+                  <a:srgbClr val="171FE2"/>
+                </a:solidFill>
+                <a:latin typeface="Consolas" panose="020B0609020204030204" pitchFamily="49" charset="0"/>
+              </a:rPr>
+              <a:t>LinkedList</a:t>
+            </a:r>
+            <a:r>
+              <a:rPr lang="it-IT" dirty="0">
+                <a:solidFill>
+                  <a:srgbClr val="171FE2"/>
+                </a:solidFill>
+                <a:latin typeface="Consolas" panose="020B0609020204030204" pitchFamily="49" charset="0"/>
+              </a:rPr>
+              <a:t>&lt;</a:t>
+            </a:r>
+            <a:r>
+              <a:rPr lang="it-IT" dirty="0" err="1">
+                <a:solidFill>
+                  <a:srgbClr val="171FE2"/>
+                </a:solidFill>
+                <a:latin typeface="Consolas" panose="020B0609020204030204" pitchFamily="49" charset="0"/>
+              </a:rPr>
+              <a:t>Integer</a:t>
+            </a:r>
+            <a:r>
+              <a:rPr lang="it-IT" dirty="0">
+                <a:solidFill>
+                  <a:srgbClr val="171FE2"/>
+                </a:solidFill>
+                <a:latin typeface="Consolas" panose="020B0609020204030204" pitchFamily="49" charset="0"/>
+              </a:rPr>
+              <a:t>&gt;</a:t>
+            </a:r>
+            <a:r>
+              <a:rPr lang="it-IT" dirty="0"/>
+              <a:t>. </a:t>
+            </a:r>
+          </a:p>
+          <a:p>
+            <a:r>
+              <a:rPr lang="it-IT" dirty="0"/>
+              <a:t>Utilizzando un ciclo for massivo, inserite un milione di numeri interi all'interno di entrambe le strutture. </a:t>
+            </a:r>
+          </a:p>
+          <a:p>
+            <a:r>
+              <a:rPr lang="it-IT" dirty="0"/>
+              <a:t>Successivamente, misurate il tempo di esecuzione espresso in millisecondi utilizzando il metodo nativo di sistema </a:t>
+            </a:r>
+            <a:r>
+              <a:rPr lang="it-IT" dirty="0" err="1">
+                <a:solidFill>
+                  <a:srgbClr val="171FE2"/>
+                </a:solidFill>
+                <a:latin typeface="Consolas" panose="020B0609020204030204" pitchFamily="49" charset="0"/>
+              </a:rPr>
+              <a:t>System.currentTimeMillis</a:t>
+            </a:r>
+            <a:r>
+              <a:rPr lang="it-IT" dirty="0">
+                <a:solidFill>
+                  <a:srgbClr val="171FE2"/>
+                </a:solidFill>
+                <a:latin typeface="Consolas" panose="020B0609020204030204" pitchFamily="49" charset="0"/>
+              </a:rPr>
+              <a:t>(); </a:t>
+            </a:r>
+            <a:r>
+              <a:rPr lang="it-IT" dirty="0"/>
+              <a:t>prima e dopo l'esecuzione di un ciclo che estrae centomila volte un elemento in una posizione centrale casuale usando il metodo </a:t>
+            </a:r>
+            <a:r>
+              <a:rPr lang="it-IT" dirty="0" err="1"/>
+              <a:t>get</a:t>
+            </a:r>
+            <a:r>
+              <a:rPr lang="it-IT" dirty="0"/>
+              <a:t>. </a:t>
+            </a:r>
+          </a:p>
+          <a:p>
+            <a:r>
+              <a:rPr lang="it-IT" dirty="0"/>
+              <a:t>Noterete una differenza di tempo macroscopica: l'</a:t>
+            </a:r>
+            <a:r>
+              <a:rPr lang="it-IT" dirty="0" err="1"/>
+              <a:t>ArrayList</a:t>
+            </a:r>
+            <a:r>
+              <a:rPr lang="it-IT" dirty="0"/>
+              <a:t> completerà l'operazione quasi istantaneamente, mentre la </a:t>
+            </a:r>
+            <a:r>
+              <a:rPr lang="it-IT" dirty="0" err="1"/>
+              <a:t>LinkedList</a:t>
+            </a:r>
+            <a:r>
+              <a:rPr lang="it-IT" dirty="0"/>
+              <a:t> impiegherà svariati secondi, dimostrando visivamente l'impatto della scelta della struttura dati.</a:t>
+            </a:r>
+            <a:endParaRPr lang="it-IT" dirty="0">
+              <a:solidFill>
+                <a:srgbClr val="171FE2"/>
+              </a:solidFill>
+            </a:endParaRPr>
+          </a:p>
+        </p:txBody>
+      </p:sp>
+    </p:spTree>
+    <p:extLst>
+      <p:ext uri="{BB962C8B-B14F-4D97-AF65-F5344CB8AC3E}">
+        <p14:creationId xmlns:p14="http://schemas.microsoft.com/office/powerpoint/2010/main" val="2058821153"/>
+      </p:ext>
+    </p:extLst>
+  </p:cSld>
+  <p:clrMapOvr>
+    <a:masterClrMapping/>
+  </p:clrMapOvr>
+</p:sld>
+</file>
+
+<file path=ppt/slides/slide16.xml><?xml version="1.0" encoding="utf-8"?>
+<p:sld xmlns:a="http://schemas.openxmlformats.org/drawingml/2006/main" xmlns:r="http://schemas.openxmlformats.org/officeDocument/2006/relationships" xmlns:p="http://schemas.openxmlformats.org/presentationml/2006/main">
+  <p:cSld>
+    <p:spTree>
+      <p:nvGrpSpPr>
+        <p:cNvPr id="1" name="">
+          <a:extLst>
+            <a:ext uri="{FF2B5EF4-FFF2-40B4-BE49-F238E27FC236}">
               <a16:creationId xmlns:a16="http://schemas.microsoft.com/office/drawing/2014/main" id="{C9F63719-482D-6F6A-2F9B-CE20E91C40E4}"/>
             </a:ext>
           </a:extLst>
@@ -4842,7 +5125,15 @@
           <a:p>
             <a:r>
               <a:rPr lang="it-IT" dirty="0"/>
-              <a:t>SLIDE 13: Esercizio Guidato – Cronometrare le Prestazioni in Laboratorio</a:t>
+              <a:t>SLIDE 14: Iterazione sulle Liste: il Ciclo For-</a:t>
+            </a:r>
+            <a:r>
+              <a:rPr lang="it-IT" dirty="0" err="1"/>
+              <a:t>Each</a:t>
+            </a:r>
+            <a:r>
+              <a:rPr lang="it-IT" dirty="0"/>
+              <a:t> e l'interfaccia Iterator</a:t>
             </a:r>
           </a:p>
         </p:txBody>
@@ -4875,84 +5166,209 @@
           <a:p>
             <a:r>
               <a:rPr lang="it-IT" dirty="0"/>
-              <a:t>Sviluppiamo l'abilità pratica di effettuare un benchmark prestazionale per toccare con mano la teoria della complessità algoritmica. Create un programma nel cui </a:t>
-            </a:r>
-            <a:r>
-              <a:rPr lang="it-IT" dirty="0" err="1"/>
-              <a:t>main</a:t>
-            </a:r>
-            <a:r>
-              <a:rPr lang="it-IT" dirty="0"/>
-              <a:t> vengono istanziati un </a:t>
-            </a:r>
-            <a:r>
-              <a:rPr lang="it-IT" dirty="0" err="1"/>
-              <a:t>ArrayList</a:t>
-            </a:r>
-            <a:r>
-              <a:rPr lang="it-IT" dirty="0"/>
-              <a:t>&lt;</a:t>
-            </a:r>
-            <a:r>
-              <a:rPr lang="it-IT" dirty="0" err="1"/>
-              <a:t>Integer</a:t>
-            </a:r>
-            <a:r>
-              <a:rPr lang="it-IT" dirty="0"/>
-              <a:t>&gt; e un </a:t>
-            </a:r>
-            <a:r>
-              <a:rPr lang="it-IT" dirty="0" err="1"/>
-              <a:t>LinkedList</a:t>
-            </a:r>
-            <a:r>
-              <a:rPr lang="it-IT" dirty="0"/>
-              <a:t>&lt;</a:t>
-            </a:r>
-            <a:r>
-              <a:rPr lang="it-IT" dirty="0" err="1"/>
-              <a:t>Integer</a:t>
-            </a:r>
-            <a:r>
-              <a:rPr lang="it-IT" dirty="0"/>
-              <a:t>&gt;. Utilizzando un ciclo for massivo, inserite un milione di numeri interi all'interno di entrambe le strutture. Successivamente, misurate il tempo di esecuzione espresso in millisecondi utilizzando il metodo nativo di sistema </a:t>
-            </a:r>
-            <a:r>
-              <a:rPr lang="it-IT" dirty="0" err="1"/>
-              <a:t>System.currentTimeMillis</a:t>
-            </a:r>
-            <a:r>
-              <a:rPr lang="it-IT" dirty="0"/>
-              <a:t>(); prima e dopo l'esecuzione di un ciclo che estrae centomila volte un elemento in una posizione centrale casuale usando il metodo </a:t>
-            </a:r>
-            <a:r>
-              <a:rPr lang="it-IT" dirty="0" err="1"/>
-              <a:t>get</a:t>
-            </a:r>
-            <a:r>
-              <a:rPr lang="it-IT" dirty="0"/>
-              <a:t>. Noterete una differenza di tempo macroscopica: l' </a:t>
-            </a:r>
-            <a:r>
-              <a:rPr lang="it-IT" dirty="0" err="1"/>
-              <a:t>ArrayList</a:t>
-            </a:r>
-            <a:r>
-              <a:rPr lang="it-IT" dirty="0"/>
-              <a:t> completerà l'operazione quasi istantaneamente, mentre la </a:t>
-            </a:r>
-            <a:r>
-              <a:rPr lang="it-IT" dirty="0" err="1"/>
-              <a:t>LinkedList</a:t>
-            </a:r>
-            <a:r>
-              <a:rPr lang="it-IT" dirty="0"/>
-              <a:t> impiegherà svariati secondi, dimostrando visivamente l'impatto della scelta della struttura dati.</a:t>
+              <a:t>Scansionare gli elementi di una lista è un'operazione quotidiana per un programmatore. </a:t>
+            </a:r>
+          </a:p>
+          <a:p>
+            <a:r>
+              <a:rPr lang="it-IT" dirty="0"/>
+              <a:t>Il modo più moderno e pulito è l'utilizzo del ciclo for-</a:t>
+            </a:r>
+            <a:r>
+              <a:rPr lang="it-IT" dirty="0" err="1"/>
+              <a:t>each</a:t>
+            </a:r>
+            <a:r>
+              <a:rPr lang="it-IT" dirty="0"/>
+              <a:t>. </a:t>
+            </a:r>
+          </a:p>
+          <a:p>
+            <a:r>
+              <a:rPr lang="it-IT" dirty="0"/>
+              <a:t>Tuttavia, il for-</a:t>
+            </a:r>
+            <a:r>
+              <a:rPr lang="it-IT" dirty="0" err="1"/>
+              <a:t>each</a:t>
+            </a:r>
+            <a:r>
+              <a:rPr lang="it-IT" dirty="0"/>
+              <a:t> nasconde un'insidia ingegneristica: se tentiamo di rimuovere un elemento dalla lista tramite il metodo </a:t>
+            </a:r>
+            <a:r>
+              <a:rPr lang="it-IT" dirty="0">
+                <a:solidFill>
+                  <a:srgbClr val="171FE2"/>
+                </a:solidFill>
+                <a:latin typeface="Consolas" panose="020B0609020204030204" pitchFamily="49" charset="0"/>
+              </a:rPr>
+              <a:t>.</a:t>
+            </a:r>
+            <a:r>
+              <a:rPr lang="it-IT" dirty="0" err="1">
+                <a:solidFill>
+                  <a:srgbClr val="171FE2"/>
+                </a:solidFill>
+                <a:latin typeface="Consolas" panose="020B0609020204030204" pitchFamily="49" charset="0"/>
+              </a:rPr>
+              <a:t>remove</a:t>
+            </a:r>
+            <a:r>
+              <a:rPr lang="it-IT" dirty="0">
+                <a:solidFill>
+                  <a:srgbClr val="171FE2"/>
+                </a:solidFill>
+                <a:latin typeface="Consolas" panose="020B0609020204030204" pitchFamily="49" charset="0"/>
+              </a:rPr>
+              <a:t>() </a:t>
+            </a:r>
+            <a:r>
+              <a:rPr lang="it-IT" dirty="0"/>
+              <a:t>mentre la stiamo </a:t>
+            </a:r>
+            <a:r>
+              <a:rPr lang="it-IT" dirty="0" err="1"/>
+              <a:t>ciclando</a:t>
+            </a:r>
+            <a:r>
+              <a:rPr lang="it-IT" dirty="0"/>
+              <a:t> con un for-</a:t>
+            </a:r>
+            <a:r>
+              <a:rPr lang="it-IT" dirty="0" err="1"/>
+              <a:t>each</a:t>
+            </a:r>
+            <a:r>
+              <a:rPr lang="it-IT" dirty="0"/>
+              <a:t>, la JVM interromperà immediatamente l'esecuzione lanciando un'eccezione catastrofica chiamata </a:t>
+            </a:r>
+            <a:r>
+              <a:rPr lang="it-IT" dirty="0" err="1"/>
+              <a:t>ConcurrentModificationException</a:t>
+            </a:r>
+            <a:r>
+              <a:rPr lang="it-IT" dirty="0"/>
+              <a:t>. </a:t>
+            </a:r>
+          </a:p>
+          <a:p>
+            <a:r>
+              <a:rPr lang="it-IT" dirty="0"/>
+              <a:t>Per rimuovere elementi in sicurezza durante la scansione, dobbiamo utilizzare esplicitamente l'oggetto Iterator (Iteratore). </a:t>
+            </a:r>
+          </a:p>
+          <a:p>
+            <a:r>
+              <a:rPr lang="it-IT" dirty="0"/>
+              <a:t>L'iteratore è un oggetto che si aggancia alla collezione e permette di scorrere i dati tramite un ciclo </a:t>
+            </a:r>
+            <a:r>
+              <a:rPr lang="it-IT" dirty="0" err="1"/>
+              <a:t>while</a:t>
+            </a:r>
+            <a:r>
+              <a:rPr lang="it-IT" dirty="0"/>
+              <a:t> governato dai metodi </a:t>
+            </a:r>
+            <a:r>
+              <a:rPr lang="it-IT" dirty="0">
+                <a:solidFill>
+                  <a:srgbClr val="171FE2"/>
+                </a:solidFill>
+                <a:latin typeface="Consolas" panose="020B0609020204030204" pitchFamily="49" charset="0"/>
+              </a:rPr>
+              <a:t>.</a:t>
+            </a:r>
+            <a:r>
+              <a:rPr lang="it-IT" dirty="0" err="1">
+                <a:solidFill>
+                  <a:srgbClr val="171FE2"/>
+                </a:solidFill>
+                <a:latin typeface="Consolas" panose="020B0609020204030204" pitchFamily="49" charset="0"/>
+              </a:rPr>
+              <a:t>hasNext</a:t>
+            </a:r>
+            <a:r>
+              <a:rPr lang="it-IT" dirty="0">
+                <a:solidFill>
+                  <a:srgbClr val="171FE2"/>
+                </a:solidFill>
+                <a:latin typeface="Consolas" panose="020B0609020204030204" pitchFamily="49" charset="0"/>
+              </a:rPr>
+              <a:t>() </a:t>
+            </a:r>
+            <a:r>
+              <a:rPr lang="it-IT" dirty="0"/>
+              <a:t>(verifica se esiste un elemento successivo) e </a:t>
+            </a:r>
+            <a:r>
+              <a:rPr lang="it-IT" dirty="0">
+                <a:solidFill>
+                  <a:srgbClr val="171FE2"/>
+                </a:solidFill>
+                <a:latin typeface="Consolas" panose="020B0609020204030204" pitchFamily="49" charset="0"/>
+              </a:rPr>
+              <a:t>.</a:t>
+            </a:r>
+            <a:r>
+              <a:rPr lang="it-IT" dirty="0" err="1">
+                <a:solidFill>
+                  <a:srgbClr val="171FE2"/>
+                </a:solidFill>
+                <a:latin typeface="Consolas" panose="020B0609020204030204" pitchFamily="49" charset="0"/>
+              </a:rPr>
+              <a:t>next</a:t>
+            </a:r>
+            <a:r>
+              <a:rPr lang="it-IT" dirty="0">
+                <a:solidFill>
+                  <a:srgbClr val="171FE2"/>
+                </a:solidFill>
+                <a:latin typeface="Consolas" panose="020B0609020204030204" pitchFamily="49" charset="0"/>
+              </a:rPr>
+              <a:t>() </a:t>
+            </a:r>
+            <a:r>
+              <a:rPr lang="it-IT" dirty="0"/>
+              <a:t>(estrae l'elemento), mettendo a disposizione il metodo sicuro </a:t>
+            </a:r>
+            <a:r>
+              <a:rPr lang="it-IT" dirty="0">
+                <a:solidFill>
+                  <a:srgbClr val="171FE2"/>
+                </a:solidFill>
+                <a:latin typeface="Consolas" panose="020B0609020204030204" pitchFamily="49" charset="0"/>
+              </a:rPr>
+              <a:t>.</a:t>
+            </a:r>
+            <a:r>
+              <a:rPr lang="it-IT" dirty="0" err="1">
+                <a:solidFill>
+                  <a:srgbClr val="171FE2"/>
+                </a:solidFill>
+                <a:latin typeface="Consolas" panose="020B0609020204030204" pitchFamily="49" charset="0"/>
+              </a:rPr>
+              <a:t>remove</a:t>
+            </a:r>
+            <a:r>
+              <a:rPr lang="it-IT" dirty="0">
+                <a:solidFill>
+                  <a:srgbClr val="171FE2"/>
+                </a:solidFill>
+                <a:latin typeface="Consolas" panose="020B0609020204030204" pitchFamily="49" charset="0"/>
+              </a:rPr>
+              <a:t>() </a:t>
+            </a:r>
+            <a:r>
+              <a:rPr lang="it-IT" dirty="0"/>
+              <a:t>dell'iteratore stesso.</a:t>
             </a:r>
             <a:endParaRPr lang="it-IT" dirty="0">
               <a:solidFill>
                 <a:srgbClr val="171FE2"/>
               </a:solidFill>
+              <a:latin typeface="Consolas" panose="020B0609020204030204" pitchFamily="49" charset="0"/>
             </a:endParaRPr>
           </a:p>
         </p:txBody>
@@ -4970,12 +5386,18 @@
 </p:sld>
 </file>
 
-<file path=ppt/slides/slide16.xml><?xml version="1.0" encoding="utf-8"?>
+<file path=ppt/slides/slide17.xml><?xml version="1.0" encoding="utf-8"?>
 <p:sld xmlns:a="http://schemas.openxmlformats.org/drawingml/2006/main" xmlns:r="http://schemas.openxmlformats.org/officeDocument/2006/relationships" xmlns:p="http://schemas.openxmlformats.org/presentationml/2006/main">
   <p:cSld>
     <p:spTree>
       <p:nvGrpSpPr>
-        <p:cNvPr id="1" name=""/>
+        <p:cNvPr id="1" name="">
+          <a:extLst>
+            <a:ext uri="{FF2B5EF4-FFF2-40B4-BE49-F238E27FC236}">
+              <a16:creationId xmlns:a16="http://schemas.microsoft.com/office/drawing/2014/main" id="{078ED3BF-2535-5D0D-DF1E-886108A368DE}"/>
+            </a:ext>
+          </a:extLst>
+        </p:cNvPr>
         <p:cNvGrpSpPr/>
         <p:nvPr/>
       </p:nvGrpSpPr>
@@ -4989,10 +5411,10 @@
       </p:grpSpPr>
       <p:sp>
         <p:nvSpPr>
-          <p:cNvPr id="2" name="Titolo 1">
+          <p:cNvPr id="2" name="Titolo della lezione">
             <a:extLst>
               <a:ext uri="{FF2B5EF4-FFF2-40B4-BE49-F238E27FC236}">
-                <a16:creationId xmlns:a16="http://schemas.microsoft.com/office/drawing/2014/main" id="{B5E02355-4941-9C10-CA1D-649F04DB5143}"/>
+                <a16:creationId xmlns:a16="http://schemas.microsoft.com/office/drawing/2014/main" id="{39B50796-0F98-7CCB-223A-8860F0387B70}"/>
               </a:ext>
             </a:extLst>
           </p:cNvPr>
@@ -5003,24 +5425,492 @@
             <p:ph type="title"/>
           </p:nvPr>
         </p:nvSpPr>
-        <p:spPr/>
+        <p:spPr>
+          <a:xfrm>
+            <a:off x="838200" y="831206"/>
+            <a:ext cx="10515600" cy="314198"/>
+          </a:xfrm>
+        </p:spPr>
         <p:txBody>
           <a:bodyPr/>
           <a:lstStyle/>
           <a:p>
             <a:r>
-              <a:rPr lang="it-IT" spc="0" dirty="0">
-                <a:latin typeface="Neue Haas Grotesk Text Pro" panose="020B0504020202020204" pitchFamily="34" charset="0"/>
-              </a:rPr>
-              <a:t>GRAZIE PER L’ATTENZIONE</a:t>
-            </a:r>
+              <a:rPr lang="it-IT" dirty="0"/>
+              <a:t>SLIDE 15: Ordinamento delle Liste: la Classe Utility </a:t>
+            </a:r>
+            <a:r>
+              <a:rPr lang="it-IT" dirty="0" err="1"/>
+              <a:t>Collections</a:t>
+            </a:r>
+            <a:endParaRPr lang="it-IT" dirty="0"/>
+          </a:p>
+        </p:txBody>
+      </p:sp>
+      <p:sp>
+        <p:nvSpPr>
+          <p:cNvPr id="3" name="Contenuto della lezione">
+            <a:extLst>
+              <a:ext uri="{FF2B5EF4-FFF2-40B4-BE49-F238E27FC236}">
+                <a16:creationId xmlns:a16="http://schemas.microsoft.com/office/drawing/2014/main" id="{C403F953-B64D-E111-A901-3D2880601850}"/>
+              </a:ext>
+            </a:extLst>
+          </p:cNvPr>
+          <p:cNvSpPr>
+            <a:spLocks noGrp="1"/>
+          </p:cNvSpPr>
+          <p:nvPr>
+            <p:ph idx="1"/>
+          </p:nvPr>
+        </p:nvSpPr>
+        <p:spPr>
+          <a:xfrm>
+            <a:off x="1317319" y="1589730"/>
+            <a:ext cx="9557362" cy="4803369"/>
+          </a:xfrm>
+        </p:spPr>
+        <p:txBody>
+          <a:bodyPr/>
+          <a:lstStyle/>
+          <a:p>
+            <a:r>
+              <a:rPr lang="it-IT" dirty="0"/>
+              <a:t>Ordinare i dati secondo criteri alfabetici o numerici è un requisito standard dei gestionali software. </a:t>
+            </a:r>
+          </a:p>
+          <a:p>
+            <a:r>
+              <a:rPr lang="it-IT" dirty="0"/>
+              <a:t>Il framework Java evita al programmatore di dover implementare manualmente algoritmi complessi come il </a:t>
+            </a:r>
+            <a:r>
+              <a:rPr lang="it-IT" dirty="0" err="1"/>
+              <a:t>BubbleSort</a:t>
+            </a:r>
+            <a:r>
+              <a:rPr lang="it-IT" dirty="0"/>
+              <a:t> o il </a:t>
+            </a:r>
+            <a:r>
+              <a:rPr lang="it-IT" dirty="0" err="1"/>
+              <a:t>QuickSort</a:t>
+            </a:r>
+            <a:r>
+              <a:rPr lang="it-IT" dirty="0"/>
+              <a:t>, mettendo a disposizione la classe utility </a:t>
+            </a:r>
+            <a:r>
+              <a:rPr lang="it-IT" dirty="0" err="1"/>
+              <a:t>Collections</a:t>
+            </a:r>
+            <a:r>
+              <a:rPr lang="it-IT" dirty="0"/>
+              <a:t> (da non confondere con l'interfaccia Collection). </a:t>
+            </a:r>
+          </a:p>
+          <a:p>
+            <a:r>
+              <a:rPr lang="it-IT" dirty="0"/>
+              <a:t>La classe </a:t>
+            </a:r>
+            <a:r>
+              <a:rPr lang="it-IT" dirty="0" err="1"/>
+              <a:t>Collections</a:t>
+            </a:r>
+            <a:r>
+              <a:rPr lang="it-IT" dirty="0"/>
+              <a:t> contiene esclusivamente metodi statici utili a operare sulle strutture dati. </a:t>
+            </a:r>
+          </a:p>
+          <a:p>
+            <a:r>
+              <a:rPr lang="it-IT" dirty="0"/>
+              <a:t>Per ordinare una lista in modo ascendente, basta invocare il metodo statico </a:t>
+            </a:r>
+            <a:r>
+              <a:rPr lang="it-IT" dirty="0" err="1"/>
+              <a:t>Collections.sort</a:t>
+            </a:r>
+            <a:r>
+              <a:rPr lang="it-IT" dirty="0"/>
+              <a:t>(</a:t>
+            </a:r>
+            <a:r>
+              <a:rPr lang="it-IT" dirty="0" err="1"/>
+              <a:t>nomeLista</a:t>
+            </a:r>
+            <a:r>
+              <a:rPr lang="it-IT" dirty="0"/>
+              <a:t>);. </a:t>
+            </a:r>
+          </a:p>
+          <a:p>
+            <a:r>
+              <a:rPr lang="it-IT" dirty="0"/>
+              <a:t>Se la lista contiene stringhe, verranno ordinate alfabeticamente; se contiene numeri, verranno ordinati in modo crescente. </a:t>
+            </a:r>
+          </a:p>
+          <a:p>
+            <a:r>
+              <a:rPr lang="it-IT" dirty="0"/>
+              <a:t>Sviluppate l'abilità pratica creando una lista disordinata di temperature decimali, applicando il metodo di ordinamento statico e verificando la corretta disposizione sequenziale dei dati stampando il report finale.</a:t>
+            </a:r>
+            <a:endParaRPr lang="it-IT" dirty="0">
+              <a:solidFill>
+                <a:srgbClr val="171FE2"/>
+              </a:solidFill>
+              <a:latin typeface="Consolas" panose="020B0609020204030204" pitchFamily="49" charset="0"/>
+            </a:endParaRPr>
           </a:p>
         </p:txBody>
       </p:sp>
     </p:spTree>
     <p:extLst>
       <p:ext uri="{BB962C8B-B14F-4D97-AF65-F5344CB8AC3E}">
-        <p14:creationId xmlns:p14="http://schemas.microsoft.com/office/powerpoint/2010/main" val="3003246572"/>
+        <p14:creationId xmlns:p14="http://schemas.microsoft.com/office/powerpoint/2010/main" val="375491208"/>
+      </p:ext>
+    </p:extLst>
+  </p:cSld>
+  <p:clrMapOvr>
+    <a:masterClrMapping/>
+  </p:clrMapOvr>
+</p:sld>
+</file>
+
+<file path=ppt/slides/slide18.xml><?xml version="1.0" encoding="utf-8"?>
+<p:sld xmlns:a="http://schemas.openxmlformats.org/drawingml/2006/main" xmlns:r="http://schemas.openxmlformats.org/officeDocument/2006/relationships" xmlns:p="http://schemas.openxmlformats.org/presentationml/2006/main">
+  <p:cSld>
+    <p:spTree>
+      <p:nvGrpSpPr>
+        <p:cNvPr id="1" name="">
+          <a:extLst>
+            <a:ext uri="{FF2B5EF4-FFF2-40B4-BE49-F238E27FC236}">
+              <a16:creationId xmlns:a16="http://schemas.microsoft.com/office/drawing/2014/main" id="{68F4D8F7-AFD5-40A2-1818-39139FAC76E5}"/>
+            </a:ext>
+          </a:extLst>
+        </p:cNvPr>
+        <p:cNvGrpSpPr/>
+        <p:nvPr/>
+      </p:nvGrpSpPr>
+      <p:grpSpPr>
+        <a:xfrm>
+          <a:off x="0" y="0"/>
+          <a:ext cx="0" cy="0"/>
+          <a:chOff x="0" y="0"/>
+          <a:chExt cx="0" cy="0"/>
+        </a:xfrm>
+      </p:grpSpPr>
+      <p:sp>
+        <p:nvSpPr>
+          <p:cNvPr id="2" name="Titolo della lezione">
+            <a:extLst>
+              <a:ext uri="{FF2B5EF4-FFF2-40B4-BE49-F238E27FC236}">
+                <a16:creationId xmlns:a16="http://schemas.microsoft.com/office/drawing/2014/main" id="{47C7EFEB-9429-11AD-4723-ED8F57EA6AFA}"/>
+              </a:ext>
+            </a:extLst>
+          </p:cNvPr>
+          <p:cNvSpPr>
+            <a:spLocks noGrp="1"/>
+          </p:cNvSpPr>
+          <p:nvPr>
+            <p:ph type="title"/>
+          </p:nvPr>
+        </p:nvSpPr>
+        <p:spPr>
+          <a:xfrm>
+            <a:off x="838200" y="831206"/>
+            <a:ext cx="10515600" cy="314198"/>
+          </a:xfrm>
+        </p:spPr>
+        <p:txBody>
+          <a:bodyPr/>
+          <a:lstStyle/>
+          <a:p>
+            <a:r>
+              <a:rPr lang="it-IT" dirty="0"/>
+              <a:t>SLIDE 16: Introduzione all'Ordinamento di Oggetti Personalizzati: l'Interfaccia Comparable</a:t>
+            </a:r>
+          </a:p>
+        </p:txBody>
+      </p:sp>
+      <p:sp>
+        <p:nvSpPr>
+          <p:cNvPr id="3" name="Contenuto della lezione">
+            <a:extLst>
+              <a:ext uri="{FF2B5EF4-FFF2-40B4-BE49-F238E27FC236}">
+                <a16:creationId xmlns:a16="http://schemas.microsoft.com/office/drawing/2014/main" id="{07BB4A66-A2EB-DBBD-B8C2-ED2067FF2B35}"/>
+              </a:ext>
+            </a:extLst>
+          </p:cNvPr>
+          <p:cNvSpPr>
+            <a:spLocks noGrp="1"/>
+          </p:cNvSpPr>
+          <p:nvPr>
+            <p:ph idx="1"/>
+          </p:nvPr>
+        </p:nvSpPr>
+        <p:spPr>
+          <a:xfrm>
+            <a:off x="1317319" y="1589730"/>
+            <a:ext cx="9557362" cy="4803369"/>
+          </a:xfrm>
+        </p:spPr>
+        <p:txBody>
+          <a:bodyPr/>
+          <a:lstStyle/>
+          <a:p>
+            <a:r>
+              <a:rPr lang="it-IT" dirty="0"/>
+              <a:t>Il metodo </a:t>
+            </a:r>
+            <a:r>
+              <a:rPr lang="it-IT" dirty="0" err="1"/>
+              <a:t>Collections.sort</a:t>
+            </a:r>
+            <a:r>
+              <a:rPr lang="it-IT" dirty="0"/>
+              <a:t>() funziona automaticamente se applicato a tipi nativi di Java (come </a:t>
+            </a:r>
+            <a:r>
+              <a:rPr lang="it-IT" dirty="0" err="1"/>
+              <a:t>String</a:t>
+            </a:r>
+            <a:r>
+              <a:rPr lang="it-IT" dirty="0"/>
+              <a:t> o </a:t>
+            </a:r>
+            <a:r>
+              <a:rPr lang="it-IT" dirty="0" err="1"/>
+              <a:t>Integer</a:t>
+            </a:r>
+            <a:r>
+              <a:rPr lang="it-IT" dirty="0"/>
+              <a:t>) perché queste classi implementano già l'interfaccia nativa Comparable. </a:t>
+            </a:r>
+          </a:p>
+          <a:p>
+            <a:r>
+              <a:rPr lang="it-IT" dirty="0"/>
+              <a:t>Ma cosa succede se proviamo a ordinare una lista di oggetti personalizzati creati da noi, come la classe </a:t>
+            </a:r>
+            <a:r>
+              <a:rPr lang="it-IT" dirty="0" err="1"/>
+              <a:t>ContoCorrente</a:t>
+            </a:r>
+            <a:r>
+              <a:rPr lang="it-IT" dirty="0"/>
+              <a:t> o la classe Studente? Il compilatore genererà un errore, perché Java non sa in base a quale criterio logico ordinare gli studenti (in base alla media voti? In base al cognome?). </a:t>
+            </a:r>
+          </a:p>
+          <a:p>
+            <a:r>
+              <a:rPr lang="it-IT" dirty="0"/>
+              <a:t>Per rendere una nostra classe ordinabile, dobbiamo implementare esplicitamente l'interfaccia Comparable&lt;T&gt; e riscrivere il metodo contrattuale public </a:t>
+            </a:r>
+            <a:r>
+              <a:rPr lang="it-IT" dirty="0" err="1"/>
+              <a:t>int</a:t>
+            </a:r>
+            <a:r>
+              <a:rPr lang="it-IT" dirty="0"/>
+              <a:t> </a:t>
+            </a:r>
+            <a:r>
+              <a:rPr lang="it-IT" dirty="0" err="1"/>
+              <a:t>compareTo</a:t>
+            </a:r>
+            <a:r>
+              <a:rPr lang="it-IT" dirty="0"/>
+              <a:t>(T altro). </a:t>
+            </a:r>
+          </a:p>
+          <a:p>
+            <a:r>
+              <a:rPr lang="it-IT" dirty="0"/>
+              <a:t>Questo metodo deve restituire un intero negativo se l'oggetto corrente è minore di quello passato, zero se sono uguali, o un intero positivo se è maggiore, definendo così l'ordinamento naturale della classe.</a:t>
+            </a:r>
+            <a:endParaRPr lang="it-IT" dirty="0">
+              <a:solidFill>
+                <a:srgbClr val="171FE2"/>
+              </a:solidFill>
+              <a:latin typeface="Consolas" panose="020B0609020204030204" pitchFamily="49" charset="0"/>
+            </a:endParaRPr>
+          </a:p>
+        </p:txBody>
+      </p:sp>
+    </p:spTree>
+    <p:extLst>
+      <p:ext uri="{BB962C8B-B14F-4D97-AF65-F5344CB8AC3E}">
+        <p14:creationId xmlns:p14="http://schemas.microsoft.com/office/powerpoint/2010/main" val="133366115"/>
+      </p:ext>
+    </p:extLst>
+  </p:cSld>
+  <p:clrMapOvr>
+    <a:masterClrMapping/>
+  </p:clrMapOvr>
+</p:sld>
+</file>
+
+<file path=ppt/slides/slide19.xml><?xml version="1.0" encoding="utf-8"?>
+<p:sld xmlns:a="http://schemas.openxmlformats.org/drawingml/2006/main" xmlns:r="http://schemas.openxmlformats.org/officeDocument/2006/relationships" xmlns:p="http://schemas.openxmlformats.org/presentationml/2006/main">
+  <p:cSld>
+    <p:spTree>
+      <p:nvGrpSpPr>
+        <p:cNvPr id="1" name="">
+          <a:extLst>
+            <a:ext uri="{FF2B5EF4-FFF2-40B4-BE49-F238E27FC236}">
+              <a16:creationId xmlns:a16="http://schemas.microsoft.com/office/drawing/2014/main" id="{A8D03334-9AB7-9B80-3777-4E56B9125B46}"/>
+            </a:ext>
+          </a:extLst>
+        </p:cNvPr>
+        <p:cNvGrpSpPr/>
+        <p:nvPr/>
+      </p:nvGrpSpPr>
+      <p:grpSpPr>
+        <a:xfrm>
+          <a:off x="0" y="0"/>
+          <a:ext cx="0" cy="0"/>
+          <a:chOff x="0" y="0"/>
+          <a:chExt cx="0" cy="0"/>
+        </a:xfrm>
+      </p:grpSpPr>
+      <p:sp>
+        <p:nvSpPr>
+          <p:cNvPr id="2" name="Titolo della lezione">
+            <a:extLst>
+              <a:ext uri="{FF2B5EF4-FFF2-40B4-BE49-F238E27FC236}">
+                <a16:creationId xmlns:a16="http://schemas.microsoft.com/office/drawing/2014/main" id="{4B8CCF66-62FF-97F3-46D8-50109C65A329}"/>
+              </a:ext>
+            </a:extLst>
+          </p:cNvPr>
+          <p:cNvSpPr>
+            <a:spLocks noGrp="1"/>
+          </p:cNvSpPr>
+          <p:nvPr>
+            <p:ph type="title"/>
+          </p:nvPr>
+        </p:nvSpPr>
+        <p:spPr>
+          <a:xfrm>
+            <a:off x="838200" y="831206"/>
+            <a:ext cx="10515600" cy="314198"/>
+          </a:xfrm>
+        </p:spPr>
+        <p:txBody>
+          <a:bodyPr/>
+          <a:lstStyle/>
+          <a:p>
+            <a:r>
+              <a:rPr lang="it-IT" dirty="0"/>
+              <a:t>SEZIONE 3: GLI INSIEMI E LE MAPPE (Slide 17 - 25)</a:t>
+            </a:r>
+            <a:br>
+              <a:rPr lang="it-IT" dirty="0"/>
+            </a:br>
+            <a:r>
+              <a:rPr lang="it-IT" dirty="0"/>
+              <a:t>SLIDE 17: Unità Didattica 2 – L'Interfaccia Set e l'Unicità dei Dati</a:t>
+            </a:r>
+          </a:p>
+        </p:txBody>
+      </p:sp>
+      <p:sp>
+        <p:nvSpPr>
+          <p:cNvPr id="3" name="Contenuto della lezione">
+            <a:extLst>
+              <a:ext uri="{FF2B5EF4-FFF2-40B4-BE49-F238E27FC236}">
+                <a16:creationId xmlns:a16="http://schemas.microsoft.com/office/drawing/2014/main" id="{3B6FCF74-B350-0EB4-0D2C-39D34E8D8BF2}"/>
+              </a:ext>
+            </a:extLst>
+          </p:cNvPr>
+          <p:cNvSpPr>
+            <a:spLocks noGrp="1"/>
+          </p:cNvSpPr>
+          <p:nvPr>
+            <p:ph idx="1"/>
+          </p:nvPr>
+        </p:nvSpPr>
+        <p:spPr>
+          <a:xfrm>
+            <a:off x="1317319" y="1589730"/>
+            <a:ext cx="9557362" cy="4803369"/>
+          </a:xfrm>
+        </p:spPr>
+        <p:txBody>
+          <a:bodyPr/>
+          <a:lstStyle/>
+          <a:p>
+            <a:r>
+              <a:rPr lang="it-IT" dirty="0"/>
+              <a:t>L'interfaccia Set modella il concetto matematico di insieme. </a:t>
+            </a:r>
+          </a:p>
+          <a:p>
+            <a:r>
+              <a:rPr lang="it-IT" dirty="0">
+                <a:solidFill>
+                  <a:srgbClr val="171FE2"/>
+                </a:solidFill>
+              </a:rPr>
+              <a:t>La sua caratteristica fondamentale e distintiva rispetto alle liste è che un Set vieta categoricamente l'introduzione di elementi duplicati all'interno della collezione. </a:t>
+            </a:r>
+          </a:p>
+          <a:p>
+            <a:r>
+              <a:rPr lang="it-IT" dirty="0"/>
+              <a:t>Se proviamo a inserire un elemento già presente usando il metodo .</a:t>
+            </a:r>
+            <a:r>
+              <a:rPr lang="it-IT" dirty="0" err="1"/>
+              <a:t>add</a:t>
+            </a:r>
+            <a:r>
+              <a:rPr lang="it-IT" dirty="0"/>
+              <a:t>(), la collezione rifiuterà l'inserimento senza generare crash, limitandosi a restituire il valore booleano false. </a:t>
+            </a:r>
+          </a:p>
+          <a:p>
+            <a:r>
+              <a:rPr lang="it-IT" dirty="0">
+                <a:solidFill>
+                  <a:srgbClr val="171FE2"/>
+                </a:solidFill>
+              </a:rPr>
+              <a:t>Altra caratteristica cruciale è l'assenza del concetto di indice numerico posizionale: in un insieme non esiste una "prima cella" o una "terza cella", gli elementi sono semplicemente presenti o assenti</a:t>
+            </a:r>
+            <a:r>
+              <a:rPr lang="it-IT" dirty="0"/>
+              <a:t>. Di conseguenza, da un Set è impossibile estrarre un elemento tramite un metodo </a:t>
+            </a:r>
+            <a:r>
+              <a:rPr lang="it-IT" dirty="0" err="1"/>
+              <a:t>get</a:t>
+            </a:r>
+            <a:r>
+              <a:rPr lang="it-IT" dirty="0"/>
+              <a:t> passando un indice; l'unico modo per analizzare i dati è verificare la presenza di un elemento specifico o scansionare l'intero insieme tramite un ciclo for-</a:t>
+            </a:r>
+            <a:r>
+              <a:rPr lang="it-IT" dirty="0" err="1"/>
+              <a:t>each</a:t>
+            </a:r>
+            <a:r>
+              <a:rPr lang="it-IT" dirty="0"/>
+              <a:t>.</a:t>
+            </a:r>
+            <a:endParaRPr lang="it-IT" dirty="0">
+              <a:solidFill>
+                <a:srgbClr val="171FE2"/>
+              </a:solidFill>
+              <a:latin typeface="Consolas" panose="020B0609020204030204" pitchFamily="49" charset="0"/>
+            </a:endParaRPr>
+          </a:p>
+        </p:txBody>
+      </p:sp>
+    </p:spTree>
+    <p:extLst>
+      <p:ext uri="{BB962C8B-B14F-4D97-AF65-F5344CB8AC3E}">
+        <p14:creationId xmlns:p14="http://schemas.microsoft.com/office/powerpoint/2010/main" val="3606255308"/>
       </p:ext>
     </p:extLst>
   </p:cSld>
@@ -5130,6 +6020,2119 @@
     <p:extLst>
       <p:ext uri="{BB962C8B-B14F-4D97-AF65-F5344CB8AC3E}">
         <p14:creationId xmlns:p14="http://schemas.microsoft.com/office/powerpoint/2010/main" val="339079353"/>
+      </p:ext>
+    </p:extLst>
+  </p:cSld>
+  <p:clrMapOvr>
+    <a:masterClrMapping/>
+  </p:clrMapOvr>
+</p:sld>
+</file>
+
+<file path=ppt/slides/slide20.xml><?xml version="1.0" encoding="utf-8"?>
+<p:sld xmlns:a="http://schemas.openxmlformats.org/drawingml/2006/main" xmlns:r="http://schemas.openxmlformats.org/officeDocument/2006/relationships" xmlns:p="http://schemas.openxmlformats.org/presentationml/2006/main">
+  <p:cSld>
+    <p:spTree>
+      <p:nvGrpSpPr>
+        <p:cNvPr id="1" name="">
+          <a:extLst>
+            <a:ext uri="{FF2B5EF4-FFF2-40B4-BE49-F238E27FC236}">
+              <a16:creationId xmlns:a16="http://schemas.microsoft.com/office/drawing/2014/main" id="{6E67269B-53E8-91F7-F05D-4BEE4E2B5B87}"/>
+            </a:ext>
+          </a:extLst>
+        </p:cNvPr>
+        <p:cNvGrpSpPr/>
+        <p:nvPr/>
+      </p:nvGrpSpPr>
+      <p:grpSpPr>
+        <a:xfrm>
+          <a:off x="0" y="0"/>
+          <a:ext cx="0" cy="0"/>
+          <a:chOff x="0" y="0"/>
+          <a:chExt cx="0" cy="0"/>
+        </a:xfrm>
+      </p:grpSpPr>
+      <p:sp>
+        <p:nvSpPr>
+          <p:cNvPr id="2" name="Titolo della lezione">
+            <a:extLst>
+              <a:ext uri="{FF2B5EF4-FFF2-40B4-BE49-F238E27FC236}">
+                <a16:creationId xmlns:a16="http://schemas.microsoft.com/office/drawing/2014/main" id="{3C105910-1262-D4AD-43A7-89966F8D2259}"/>
+              </a:ext>
+            </a:extLst>
+          </p:cNvPr>
+          <p:cNvSpPr>
+            <a:spLocks noGrp="1"/>
+          </p:cNvSpPr>
+          <p:nvPr>
+            <p:ph type="title"/>
+          </p:nvPr>
+        </p:nvSpPr>
+        <p:spPr>
+          <a:xfrm>
+            <a:off x="838200" y="831206"/>
+            <a:ext cx="10515600" cy="314198"/>
+          </a:xfrm>
+        </p:spPr>
+        <p:txBody>
+          <a:bodyPr/>
+          <a:lstStyle/>
+          <a:p>
+            <a:r>
+              <a:rPr lang="it-IT" dirty="0"/>
+              <a:t>SLIDE 18: La Classe </a:t>
+            </a:r>
+            <a:r>
+              <a:rPr lang="it-IT" dirty="0" err="1"/>
+              <a:t>HashSet</a:t>
+            </a:r>
+            <a:r>
+              <a:rPr lang="it-IT" dirty="0"/>
+              <a:t> e il Funzionamento delle Tabelle </a:t>
+            </a:r>
+            <a:r>
+              <a:rPr lang="it-IT" dirty="0" err="1"/>
+              <a:t>Hash</a:t>
+            </a:r>
+            <a:endParaRPr lang="it-IT" dirty="0"/>
+          </a:p>
+        </p:txBody>
+      </p:sp>
+      <p:sp>
+        <p:nvSpPr>
+          <p:cNvPr id="3" name="Contenuto della lezione">
+            <a:extLst>
+              <a:ext uri="{FF2B5EF4-FFF2-40B4-BE49-F238E27FC236}">
+                <a16:creationId xmlns:a16="http://schemas.microsoft.com/office/drawing/2014/main" id="{31682FAE-4979-BBB4-1330-8B13B6131988}"/>
+              </a:ext>
+            </a:extLst>
+          </p:cNvPr>
+          <p:cNvSpPr>
+            <a:spLocks noGrp="1"/>
+          </p:cNvSpPr>
+          <p:nvPr>
+            <p:ph idx="1"/>
+          </p:nvPr>
+        </p:nvSpPr>
+        <p:spPr>
+          <a:xfrm>
+            <a:off x="1317319" y="1589730"/>
+            <a:ext cx="9557362" cy="4803369"/>
+          </a:xfrm>
+        </p:spPr>
+        <p:txBody>
+          <a:bodyPr/>
+          <a:lstStyle/>
+          <a:p>
+            <a:r>
+              <a:rPr lang="it-IT" dirty="0"/>
+              <a:t>L'implementazione più utilizzata dell'interfaccia Set è la classe </a:t>
+            </a:r>
+            <a:r>
+              <a:rPr lang="it-IT" dirty="0" err="1"/>
+              <a:t>HashSet</a:t>
+            </a:r>
+            <a:r>
+              <a:rPr lang="it-IT" dirty="0"/>
+              <a:t>. </a:t>
+            </a:r>
+          </a:p>
+          <a:p>
+            <a:r>
+              <a:rPr lang="it-IT" dirty="0"/>
+              <a:t>Per garantire prestazioni fulminee, l' </a:t>
+            </a:r>
+            <a:r>
+              <a:rPr lang="it-IT" dirty="0" err="1"/>
+              <a:t>HashSet</a:t>
+            </a:r>
+            <a:r>
+              <a:rPr lang="it-IT" dirty="0"/>
+              <a:t> si basa internamente su una struttura dati algoritmica chiamata Tabella </a:t>
+            </a:r>
+            <a:r>
+              <a:rPr lang="it-IT" dirty="0" err="1"/>
+              <a:t>Hash</a:t>
+            </a:r>
+            <a:r>
+              <a:rPr lang="it-IT" dirty="0"/>
+              <a:t>. </a:t>
+            </a:r>
+          </a:p>
+          <a:p>
+            <a:r>
+              <a:rPr lang="it-IT" dirty="0"/>
+              <a:t>Quando inseriamo un oggetto in un </a:t>
+            </a:r>
+            <a:r>
+              <a:rPr lang="it-IT" dirty="0" err="1"/>
+              <a:t>HashSet</a:t>
+            </a:r>
+            <a:r>
+              <a:rPr lang="it-IT" dirty="0"/>
+              <a:t>, la JVM invoca sull'oggetto un metodo nativo speciale chiamato </a:t>
+            </a:r>
+            <a:r>
+              <a:rPr lang="it-IT" dirty="0" err="1"/>
+              <a:t>hashCode</a:t>
+            </a:r>
+            <a:r>
+              <a:rPr lang="it-IT" dirty="0"/>
+              <a:t>(), che traduce lo stato interno dell'oggetto in un numero intero (una sorta di impronta digitale). </a:t>
+            </a:r>
+          </a:p>
+          <a:p>
+            <a:r>
+              <a:rPr lang="it-IT" dirty="0"/>
+              <a:t>Questo numero viene utilizzato come indice matematico per posizionare l'oggetto all'interno di "secchi" (buckets) di memoria Heap. </a:t>
+            </a:r>
+          </a:p>
+          <a:p>
+            <a:r>
+              <a:rPr lang="it-IT" dirty="0"/>
+              <a:t>Grazie a questo meccanismo di indicizzazione algoritmica, l' </a:t>
+            </a:r>
+            <a:r>
+              <a:rPr lang="it-IT" dirty="0" err="1"/>
+              <a:t>HashSet</a:t>
+            </a:r>
+            <a:r>
+              <a:rPr lang="it-IT" dirty="0"/>
+              <a:t> offre prestazioni straordinarie: l'operazione di ricerca di un elemento tramite il metodo .</a:t>
+            </a:r>
+            <a:r>
+              <a:rPr lang="it-IT" dirty="0" err="1"/>
+              <a:t>contains</a:t>
+            </a:r>
+            <a:r>
+              <a:rPr lang="it-IT" dirty="0"/>
+              <a:t>(elemento) richiede un tempo costante O(1), indipendentemente dal fatto che l'insieme contenga dieci o dieci milioni di elementi.</a:t>
+            </a:r>
+            <a:endParaRPr lang="it-IT" dirty="0">
+              <a:solidFill>
+                <a:srgbClr val="171FE2"/>
+              </a:solidFill>
+              <a:latin typeface="Consolas" panose="020B0609020204030204" pitchFamily="49" charset="0"/>
+            </a:endParaRPr>
+          </a:p>
+        </p:txBody>
+      </p:sp>
+    </p:spTree>
+    <p:extLst>
+      <p:ext uri="{BB962C8B-B14F-4D97-AF65-F5344CB8AC3E}">
+        <p14:creationId xmlns:p14="http://schemas.microsoft.com/office/powerpoint/2010/main" val="172382596"/>
+      </p:ext>
+    </p:extLst>
+  </p:cSld>
+  <p:clrMapOvr>
+    <a:masterClrMapping/>
+  </p:clrMapOvr>
+</p:sld>
+</file>
+
+<file path=ppt/slides/slide21.xml><?xml version="1.0" encoding="utf-8"?>
+<p:sld xmlns:a="http://schemas.openxmlformats.org/drawingml/2006/main" xmlns:r="http://schemas.openxmlformats.org/officeDocument/2006/relationships" xmlns:p="http://schemas.openxmlformats.org/presentationml/2006/main">
+  <p:cSld>
+    <p:spTree>
+      <p:nvGrpSpPr>
+        <p:cNvPr id="1" name="">
+          <a:extLst>
+            <a:ext uri="{FF2B5EF4-FFF2-40B4-BE49-F238E27FC236}">
+              <a16:creationId xmlns:a16="http://schemas.microsoft.com/office/drawing/2014/main" id="{0AF28F5B-CC74-83FA-1CBE-3CC78F9918E2}"/>
+            </a:ext>
+          </a:extLst>
+        </p:cNvPr>
+        <p:cNvGrpSpPr/>
+        <p:nvPr/>
+      </p:nvGrpSpPr>
+      <p:grpSpPr>
+        <a:xfrm>
+          <a:off x="0" y="0"/>
+          <a:ext cx="0" cy="0"/>
+          <a:chOff x="0" y="0"/>
+          <a:chExt cx="0" cy="0"/>
+        </a:xfrm>
+      </p:grpSpPr>
+      <p:sp>
+        <p:nvSpPr>
+          <p:cNvPr id="2" name="Titolo della lezione">
+            <a:extLst>
+              <a:ext uri="{FF2B5EF4-FFF2-40B4-BE49-F238E27FC236}">
+                <a16:creationId xmlns:a16="http://schemas.microsoft.com/office/drawing/2014/main" id="{8B26B5B2-A4F4-B9A6-BE7A-24D7C4877C73}"/>
+              </a:ext>
+            </a:extLst>
+          </p:cNvPr>
+          <p:cNvSpPr>
+            <a:spLocks noGrp="1"/>
+          </p:cNvSpPr>
+          <p:nvPr>
+            <p:ph type="title"/>
+          </p:nvPr>
+        </p:nvSpPr>
+        <p:spPr>
+          <a:xfrm>
+            <a:off x="838200" y="831206"/>
+            <a:ext cx="10515600" cy="314198"/>
+          </a:xfrm>
+        </p:spPr>
+        <p:txBody>
+          <a:bodyPr/>
+          <a:lstStyle/>
+          <a:p>
+            <a:r>
+              <a:rPr lang="it-IT" dirty="0"/>
+              <a:t>SLIDE 19: L'importanza di </a:t>
+            </a:r>
+            <a:r>
+              <a:rPr lang="it-IT" dirty="0" err="1"/>
+              <a:t>hashCode</a:t>
+            </a:r>
+            <a:r>
+              <a:rPr lang="it-IT" dirty="0"/>
+              <a:t>() ed </a:t>
+            </a:r>
+            <a:r>
+              <a:rPr lang="it-IT" dirty="0" err="1"/>
+              <a:t>equals</a:t>
+            </a:r>
+            <a:r>
+              <a:rPr lang="it-IT" dirty="0"/>
+              <a:t>() nell'</a:t>
+            </a:r>
+            <a:r>
+              <a:rPr lang="it-IT" dirty="0" err="1"/>
+              <a:t>HashSet</a:t>
+            </a:r>
+            <a:endParaRPr lang="it-IT" dirty="0"/>
+          </a:p>
+        </p:txBody>
+      </p:sp>
+      <p:sp>
+        <p:nvSpPr>
+          <p:cNvPr id="3" name="Contenuto della lezione">
+            <a:extLst>
+              <a:ext uri="{FF2B5EF4-FFF2-40B4-BE49-F238E27FC236}">
+                <a16:creationId xmlns:a16="http://schemas.microsoft.com/office/drawing/2014/main" id="{1A789CF7-53F1-2006-CA5E-1F1FC1CD3D66}"/>
+              </a:ext>
+            </a:extLst>
+          </p:cNvPr>
+          <p:cNvSpPr>
+            <a:spLocks noGrp="1"/>
+          </p:cNvSpPr>
+          <p:nvPr>
+            <p:ph idx="1"/>
+          </p:nvPr>
+        </p:nvSpPr>
+        <p:spPr>
+          <a:xfrm>
+            <a:off x="1317319" y="1589730"/>
+            <a:ext cx="9557362" cy="4803369"/>
+          </a:xfrm>
+        </p:spPr>
+        <p:txBody>
+          <a:bodyPr/>
+          <a:lstStyle/>
+          <a:p>
+            <a:r>
+              <a:rPr lang="it-IT" dirty="0"/>
+              <a:t>Il funzionamento sicuro di un </a:t>
+            </a:r>
+            <a:r>
+              <a:rPr lang="it-IT" dirty="0" err="1"/>
+              <a:t>HashSet</a:t>
+            </a:r>
+            <a:r>
+              <a:rPr lang="it-IT" dirty="0"/>
+              <a:t> (e la sua capacità di intercettare i duplicati) dipende strettamente da un contratto formale che lega due metodi ereditati da ogni oggetto in Java: </a:t>
+            </a:r>
+            <a:r>
+              <a:rPr lang="it-IT" dirty="0" err="1"/>
+              <a:t>equals</a:t>
+            </a:r>
+            <a:r>
+              <a:rPr lang="it-IT" dirty="0"/>
+              <a:t>() e </a:t>
+            </a:r>
+            <a:r>
+              <a:rPr lang="it-IT" dirty="0" err="1"/>
+              <a:t>hashCode</a:t>
+            </a:r>
+            <a:r>
+              <a:rPr lang="it-IT" dirty="0"/>
+              <a:t>(). </a:t>
+            </a:r>
+          </a:p>
+          <a:p>
+            <a:r>
+              <a:rPr lang="it-IT" dirty="0"/>
+              <a:t>Se sviluppiamo una classe personalizzata (es. Studente) e vogliamo inserirla in un </a:t>
+            </a:r>
+            <a:r>
+              <a:rPr lang="it-IT" dirty="0" err="1"/>
+              <a:t>HashSet</a:t>
+            </a:r>
+            <a:r>
+              <a:rPr lang="it-IT" dirty="0"/>
+              <a:t> impedendo che lo stesso studente venga inserito due volte, siamo obbligati a effettuare l'</a:t>
+            </a:r>
+            <a:r>
+              <a:rPr lang="it-IT" dirty="0" err="1"/>
+              <a:t>override</a:t>
+            </a:r>
+            <a:r>
+              <a:rPr lang="it-IT" dirty="0"/>
+              <a:t> di entrambi i metodi all'interno della classe. </a:t>
+            </a:r>
+          </a:p>
+          <a:p>
+            <a:r>
+              <a:rPr lang="it-IT" dirty="0">
+                <a:solidFill>
+                  <a:srgbClr val="171FE2"/>
+                </a:solidFill>
+              </a:rPr>
+              <a:t>La regola ingegneristica recita: se due oggetti sono considerati uguali dal metodo </a:t>
+            </a:r>
+            <a:r>
+              <a:rPr lang="it-IT" dirty="0" err="1">
+                <a:solidFill>
+                  <a:srgbClr val="171FE2"/>
+                </a:solidFill>
+              </a:rPr>
+              <a:t>equals</a:t>
+            </a:r>
+            <a:r>
+              <a:rPr lang="it-IT" dirty="0">
+                <a:solidFill>
+                  <a:srgbClr val="171FE2"/>
+                </a:solidFill>
+              </a:rPr>
+              <a:t>(), essi devono obbligatoriamente restituire lo stesso identico valore intero dal metodo </a:t>
+            </a:r>
+            <a:r>
+              <a:rPr lang="it-IT" dirty="0" err="1">
+                <a:solidFill>
+                  <a:srgbClr val="171FE2"/>
+                </a:solidFill>
+              </a:rPr>
+              <a:t>hashCode</a:t>
+            </a:r>
+            <a:r>
+              <a:rPr lang="it-IT" dirty="0">
+                <a:solidFill>
+                  <a:srgbClr val="171FE2"/>
+                </a:solidFill>
+              </a:rPr>
+              <a:t>()</a:t>
+            </a:r>
+            <a:r>
+              <a:rPr lang="it-IT" dirty="0"/>
+              <a:t>. </a:t>
+            </a:r>
+          </a:p>
+          <a:p>
+            <a:r>
+              <a:rPr lang="it-IT" dirty="0"/>
+              <a:t>Se omettiamo di ridefinire questi metodi, Java utilizzerà le implementazioni native basate sugli indirizzi fisici di memoria, col risultato che due oggetti distinti nello Heap con gli stessi identici dati verranno considerati diversi, rompendo l'unicità del Set.</a:t>
+            </a:r>
+            <a:endParaRPr lang="it-IT" dirty="0">
+              <a:solidFill>
+                <a:srgbClr val="171FE2"/>
+              </a:solidFill>
+              <a:latin typeface="Consolas" panose="020B0609020204030204" pitchFamily="49" charset="0"/>
+            </a:endParaRPr>
+          </a:p>
+        </p:txBody>
+      </p:sp>
+    </p:spTree>
+    <p:extLst>
+      <p:ext uri="{BB962C8B-B14F-4D97-AF65-F5344CB8AC3E}">
+        <p14:creationId xmlns:p14="http://schemas.microsoft.com/office/powerpoint/2010/main" val="4229479623"/>
+      </p:ext>
+    </p:extLst>
+  </p:cSld>
+  <p:clrMapOvr>
+    <a:masterClrMapping/>
+  </p:clrMapOvr>
+</p:sld>
+</file>
+
+<file path=ppt/slides/slide22.xml><?xml version="1.0" encoding="utf-8"?>
+<p:sld xmlns:a="http://schemas.openxmlformats.org/drawingml/2006/main" xmlns:r="http://schemas.openxmlformats.org/officeDocument/2006/relationships" xmlns:p="http://schemas.openxmlformats.org/presentationml/2006/main">
+  <p:cSld>
+    <p:spTree>
+      <p:nvGrpSpPr>
+        <p:cNvPr id="1" name="">
+          <a:extLst>
+            <a:ext uri="{FF2B5EF4-FFF2-40B4-BE49-F238E27FC236}">
+              <a16:creationId xmlns:a16="http://schemas.microsoft.com/office/drawing/2014/main" id="{D780885F-36C5-3C31-055B-9540D05E8BA6}"/>
+            </a:ext>
+          </a:extLst>
+        </p:cNvPr>
+        <p:cNvGrpSpPr/>
+        <p:nvPr/>
+      </p:nvGrpSpPr>
+      <p:grpSpPr>
+        <a:xfrm>
+          <a:off x="0" y="0"/>
+          <a:ext cx="0" cy="0"/>
+          <a:chOff x="0" y="0"/>
+          <a:chExt cx="0" cy="0"/>
+        </a:xfrm>
+      </p:grpSpPr>
+      <p:sp>
+        <p:nvSpPr>
+          <p:cNvPr id="2" name="Titolo della lezione">
+            <a:extLst>
+              <a:ext uri="{FF2B5EF4-FFF2-40B4-BE49-F238E27FC236}">
+                <a16:creationId xmlns:a16="http://schemas.microsoft.com/office/drawing/2014/main" id="{881384E2-53FA-4A1F-3A5C-C567F099B256}"/>
+              </a:ext>
+            </a:extLst>
+          </p:cNvPr>
+          <p:cNvSpPr>
+            <a:spLocks noGrp="1"/>
+          </p:cNvSpPr>
+          <p:nvPr>
+            <p:ph type="title"/>
+          </p:nvPr>
+        </p:nvSpPr>
+        <p:spPr>
+          <a:xfrm>
+            <a:off x="838200" y="831206"/>
+            <a:ext cx="10515600" cy="314198"/>
+          </a:xfrm>
+        </p:spPr>
+        <p:txBody>
+          <a:bodyPr/>
+          <a:lstStyle/>
+          <a:p>
+            <a:r>
+              <a:rPr lang="it-IT" dirty="0"/>
+              <a:t>SLIDE 20: Varianti del Set: </a:t>
+            </a:r>
+            <a:r>
+              <a:rPr lang="it-IT" dirty="0" err="1"/>
+              <a:t>LinkedHashSet</a:t>
+            </a:r>
+            <a:r>
+              <a:rPr lang="it-IT" dirty="0"/>
+              <a:t> e </a:t>
+            </a:r>
+            <a:r>
+              <a:rPr lang="it-IT" dirty="0" err="1"/>
+              <a:t>TreeSet</a:t>
+            </a:r>
+            <a:endParaRPr lang="it-IT" dirty="0"/>
+          </a:p>
+        </p:txBody>
+      </p:sp>
+      <p:sp>
+        <p:nvSpPr>
+          <p:cNvPr id="3" name="Contenuto della lezione">
+            <a:extLst>
+              <a:ext uri="{FF2B5EF4-FFF2-40B4-BE49-F238E27FC236}">
+                <a16:creationId xmlns:a16="http://schemas.microsoft.com/office/drawing/2014/main" id="{E151EA61-1974-85D5-8A12-F80950FDF4B9}"/>
+              </a:ext>
+            </a:extLst>
+          </p:cNvPr>
+          <p:cNvSpPr>
+            <a:spLocks noGrp="1"/>
+          </p:cNvSpPr>
+          <p:nvPr>
+            <p:ph idx="1"/>
+          </p:nvPr>
+        </p:nvSpPr>
+        <p:spPr>
+          <a:xfrm>
+            <a:off x="1317319" y="1589730"/>
+            <a:ext cx="9557362" cy="4803369"/>
+          </a:xfrm>
+        </p:spPr>
+        <p:txBody>
+          <a:bodyPr/>
+          <a:lstStyle/>
+          <a:p>
+            <a:r>
+              <a:rPr lang="it-IT" dirty="0"/>
+              <a:t>La classe </a:t>
+            </a:r>
+            <a:r>
+              <a:rPr lang="it-IT" dirty="0" err="1"/>
+              <a:t>HashSet</a:t>
+            </a:r>
+            <a:r>
+              <a:rPr lang="it-IT" dirty="0"/>
+              <a:t> standard non garantisce alcun ordine di inserimento: stampando l'insieme, gli elementi compariranno in posizioni apparentemente casuali determinate dagli algoritmi di </a:t>
+            </a:r>
+            <a:r>
+              <a:rPr lang="it-IT" dirty="0" err="1"/>
+              <a:t>hash</a:t>
+            </a:r>
+            <a:r>
+              <a:rPr lang="it-IT" dirty="0"/>
+              <a:t>. </a:t>
+            </a:r>
+          </a:p>
+          <a:p>
+            <a:r>
+              <a:rPr lang="it-IT" dirty="0"/>
+              <a:t>Se l'applicazione richiede il controllo dell'ordine, Java offre due varianti. </a:t>
+            </a:r>
+          </a:p>
+          <a:p>
+            <a:pPr marL="285750" indent="-285750">
+              <a:buFont typeface="Arial" panose="020B0604020202020204" pitchFamily="34" charset="0"/>
+              <a:buChar char="•"/>
+            </a:pPr>
+            <a:r>
+              <a:rPr lang="it-IT" dirty="0"/>
+              <a:t>La classe </a:t>
+            </a:r>
+            <a:r>
+              <a:rPr lang="it-IT" dirty="0" err="1"/>
+              <a:t>LinkedHashSet</a:t>
+            </a:r>
+            <a:r>
+              <a:rPr lang="it-IT" dirty="0"/>
+              <a:t> mantiene l'unicità assoluta dei dati ma introduce internamente una lista doppiamente concatenata che memorizza l'ordine esatto con cui gli elementi sono stati inseriti dall'utente. </a:t>
+            </a:r>
+          </a:p>
+          <a:p>
+            <a:pPr marL="285750" indent="-285750">
+              <a:buFont typeface="Arial" panose="020B0604020202020204" pitchFamily="34" charset="0"/>
+              <a:buChar char="•"/>
+            </a:pPr>
+            <a:r>
+              <a:rPr lang="it-IT" dirty="0"/>
+              <a:t>La classe </a:t>
+            </a:r>
+            <a:r>
+              <a:rPr lang="it-IT" dirty="0" err="1"/>
+              <a:t>TreeSet</a:t>
+            </a:r>
+            <a:r>
+              <a:rPr lang="it-IT" dirty="0"/>
+              <a:t>, invece, memorizza gli elementi strutturandoli internamente sotto forma di un albero binario auto-bilanciato. Il </a:t>
+            </a:r>
+            <a:r>
+              <a:rPr lang="it-IT" dirty="0" err="1"/>
+              <a:t>TreeSet</a:t>
+            </a:r>
+            <a:r>
+              <a:rPr lang="it-IT" dirty="0"/>
+              <a:t> garantisce che gli elementi inseriti siano costantemente e automaticamente ordinati in tempo reale secondo il loro ordine naturale (es. alfabetico o numerico). Questa sofisticata struttura dati richiede però una complessità temporale di ricerca pari a O(log N).</a:t>
+            </a:r>
+            <a:endParaRPr lang="it-IT" dirty="0">
+              <a:solidFill>
+                <a:srgbClr val="171FE2"/>
+              </a:solidFill>
+              <a:latin typeface="Consolas" panose="020B0609020204030204" pitchFamily="49" charset="0"/>
+            </a:endParaRPr>
+          </a:p>
+        </p:txBody>
+      </p:sp>
+    </p:spTree>
+    <p:extLst>
+      <p:ext uri="{BB962C8B-B14F-4D97-AF65-F5344CB8AC3E}">
+        <p14:creationId xmlns:p14="http://schemas.microsoft.com/office/powerpoint/2010/main" val="68384804"/>
+      </p:ext>
+    </p:extLst>
+  </p:cSld>
+  <p:clrMapOvr>
+    <a:masterClrMapping/>
+  </p:clrMapOvr>
+</p:sld>
+</file>
+
+<file path=ppt/slides/slide23.xml><?xml version="1.0" encoding="utf-8"?>
+<p:sld xmlns:a="http://schemas.openxmlformats.org/drawingml/2006/main" xmlns:r="http://schemas.openxmlformats.org/officeDocument/2006/relationships" xmlns:p="http://schemas.openxmlformats.org/presentationml/2006/main">
+  <p:cSld>
+    <p:spTree>
+      <p:nvGrpSpPr>
+        <p:cNvPr id="1" name="">
+          <a:extLst>
+            <a:ext uri="{FF2B5EF4-FFF2-40B4-BE49-F238E27FC236}">
+              <a16:creationId xmlns:a16="http://schemas.microsoft.com/office/drawing/2014/main" id="{374E1F36-C647-45F9-CA81-568EF5A5BEFC}"/>
+            </a:ext>
+          </a:extLst>
+        </p:cNvPr>
+        <p:cNvGrpSpPr/>
+        <p:nvPr/>
+      </p:nvGrpSpPr>
+      <p:grpSpPr>
+        <a:xfrm>
+          <a:off x="0" y="0"/>
+          <a:ext cx="0" cy="0"/>
+          <a:chOff x="0" y="0"/>
+          <a:chExt cx="0" cy="0"/>
+        </a:xfrm>
+      </p:grpSpPr>
+      <p:sp>
+        <p:nvSpPr>
+          <p:cNvPr id="2" name="Titolo della lezione">
+            <a:extLst>
+              <a:ext uri="{FF2B5EF4-FFF2-40B4-BE49-F238E27FC236}">
+                <a16:creationId xmlns:a16="http://schemas.microsoft.com/office/drawing/2014/main" id="{923D96FE-8EBF-B1BC-CF5E-BFE19841841F}"/>
+              </a:ext>
+            </a:extLst>
+          </p:cNvPr>
+          <p:cNvSpPr>
+            <a:spLocks noGrp="1"/>
+          </p:cNvSpPr>
+          <p:nvPr>
+            <p:ph type="title"/>
+          </p:nvPr>
+        </p:nvSpPr>
+        <p:spPr>
+          <a:xfrm>
+            <a:off x="838200" y="831206"/>
+            <a:ext cx="10515600" cy="314198"/>
+          </a:xfrm>
+        </p:spPr>
+        <p:txBody>
+          <a:bodyPr/>
+          <a:lstStyle/>
+          <a:p>
+            <a:r>
+              <a:rPr lang="it-IT" dirty="0"/>
+              <a:t>SLIDE 21: L'Interfaccia </a:t>
+            </a:r>
+            <a:r>
+              <a:rPr lang="it-IT" dirty="0" err="1"/>
+              <a:t>Map</a:t>
+            </a:r>
+            <a:r>
+              <a:rPr lang="it-IT" dirty="0"/>
+              <a:t> e la Struttura Chiave-Valore</a:t>
+            </a:r>
+          </a:p>
+        </p:txBody>
+      </p:sp>
+      <p:sp>
+        <p:nvSpPr>
+          <p:cNvPr id="3" name="Contenuto della lezione">
+            <a:extLst>
+              <a:ext uri="{FF2B5EF4-FFF2-40B4-BE49-F238E27FC236}">
+                <a16:creationId xmlns:a16="http://schemas.microsoft.com/office/drawing/2014/main" id="{9AB29CD5-3E9E-0E6C-8582-7B5044A7A76D}"/>
+              </a:ext>
+            </a:extLst>
+          </p:cNvPr>
+          <p:cNvSpPr>
+            <a:spLocks noGrp="1"/>
+          </p:cNvSpPr>
+          <p:nvPr>
+            <p:ph idx="1"/>
+          </p:nvPr>
+        </p:nvSpPr>
+        <p:spPr>
+          <a:xfrm>
+            <a:off x="1317319" y="1589730"/>
+            <a:ext cx="9557362" cy="4803369"/>
+          </a:xfrm>
+        </p:spPr>
+        <p:txBody>
+          <a:bodyPr/>
+          <a:lstStyle/>
+          <a:p>
+            <a:r>
+              <a:rPr lang="it-IT" dirty="0"/>
+              <a:t>L'interfaccia </a:t>
+            </a:r>
+            <a:r>
+              <a:rPr lang="it-IT" dirty="0" err="1"/>
+              <a:t>Map</a:t>
+            </a:r>
+            <a:r>
+              <a:rPr lang="it-IT" dirty="0"/>
+              <a:t> definisce una struttura dati concettualmente separata dalle collezioni standard, focalizzata sulla modellazione di relazioni basate su coppie "Chiave-Valore".</a:t>
+            </a:r>
+          </a:p>
+          <a:p>
+            <a:r>
+              <a:rPr lang="it-IT" dirty="0"/>
+              <a:t>Una mappa agisce come un dizionario o un elenco telefonico: a una chiave univoca (es. il codice fiscale o il numero di matricola) viene associato un determinato valore (es. l'oggetto Studente). </a:t>
+            </a:r>
+          </a:p>
+          <a:p>
+            <a:r>
+              <a:rPr lang="it-IT" dirty="0">
+                <a:solidFill>
+                  <a:srgbClr val="171FE2"/>
+                </a:solidFill>
+              </a:rPr>
+              <a:t>Le regole della struttura prevedono che le chiavi debbano essere tassativamente uniche all'interno della mappa: non possono esistere due coppie con la stessa chiave. </a:t>
+            </a:r>
+          </a:p>
+          <a:p>
+            <a:r>
+              <a:rPr lang="it-IT" dirty="0">
+                <a:solidFill>
+                  <a:srgbClr val="171FE2"/>
+                </a:solidFill>
+              </a:rPr>
+              <a:t>I valori associati, invece, possono essere duplicati liberamente (due chiavi diverse possono puntare allo stesso identico valore). </a:t>
+            </a:r>
+          </a:p>
+          <a:p>
+            <a:r>
+              <a:rPr lang="it-IT" dirty="0"/>
+              <a:t>Le mappe sono uno strumento architetturale di potenza incalcolabile nello sviluppo </a:t>
+            </a:r>
+            <a:r>
+              <a:rPr lang="it-IT" dirty="0" err="1"/>
+              <a:t>enterprise</a:t>
+            </a:r>
+            <a:r>
+              <a:rPr lang="it-IT" dirty="0"/>
+              <a:t> per l'indicizzazione rapida e la memorizzazione in cache dei dati.</a:t>
+            </a:r>
+            <a:endParaRPr lang="it-IT" dirty="0">
+              <a:solidFill>
+                <a:srgbClr val="171FE2"/>
+              </a:solidFill>
+              <a:latin typeface="Consolas" panose="020B0609020204030204" pitchFamily="49" charset="0"/>
+            </a:endParaRPr>
+          </a:p>
+        </p:txBody>
+      </p:sp>
+    </p:spTree>
+    <p:extLst>
+      <p:ext uri="{BB962C8B-B14F-4D97-AF65-F5344CB8AC3E}">
+        <p14:creationId xmlns:p14="http://schemas.microsoft.com/office/powerpoint/2010/main" val="358766234"/>
+      </p:ext>
+    </p:extLst>
+  </p:cSld>
+  <p:clrMapOvr>
+    <a:masterClrMapping/>
+  </p:clrMapOvr>
+</p:sld>
+</file>
+
+<file path=ppt/slides/slide24.xml><?xml version="1.0" encoding="utf-8"?>
+<p:sld xmlns:a="http://schemas.openxmlformats.org/drawingml/2006/main" xmlns:r="http://schemas.openxmlformats.org/officeDocument/2006/relationships" xmlns:p="http://schemas.openxmlformats.org/presentationml/2006/main">
+  <p:cSld>
+    <p:spTree>
+      <p:nvGrpSpPr>
+        <p:cNvPr id="1" name="">
+          <a:extLst>
+            <a:ext uri="{FF2B5EF4-FFF2-40B4-BE49-F238E27FC236}">
+              <a16:creationId xmlns:a16="http://schemas.microsoft.com/office/drawing/2014/main" id="{668563DF-AC18-F8E6-0CA4-7566B8A7C763}"/>
+            </a:ext>
+          </a:extLst>
+        </p:cNvPr>
+        <p:cNvGrpSpPr/>
+        <p:nvPr/>
+      </p:nvGrpSpPr>
+      <p:grpSpPr>
+        <a:xfrm>
+          <a:off x="0" y="0"/>
+          <a:ext cx="0" cy="0"/>
+          <a:chOff x="0" y="0"/>
+          <a:chExt cx="0" cy="0"/>
+        </a:xfrm>
+      </p:grpSpPr>
+      <p:sp>
+        <p:nvSpPr>
+          <p:cNvPr id="2" name="Titolo della lezione">
+            <a:extLst>
+              <a:ext uri="{FF2B5EF4-FFF2-40B4-BE49-F238E27FC236}">
+                <a16:creationId xmlns:a16="http://schemas.microsoft.com/office/drawing/2014/main" id="{19A75482-8886-5C1F-C957-0C655EF1AB6C}"/>
+              </a:ext>
+            </a:extLst>
+          </p:cNvPr>
+          <p:cNvSpPr>
+            <a:spLocks noGrp="1"/>
+          </p:cNvSpPr>
+          <p:nvPr>
+            <p:ph type="title"/>
+          </p:nvPr>
+        </p:nvSpPr>
+        <p:spPr>
+          <a:xfrm>
+            <a:off x="838200" y="831206"/>
+            <a:ext cx="10515600" cy="314198"/>
+          </a:xfrm>
+        </p:spPr>
+        <p:txBody>
+          <a:bodyPr/>
+          <a:lstStyle/>
+          <a:p>
+            <a:r>
+              <a:rPr lang="it-IT" dirty="0"/>
+              <a:t>SLIDE 22: La Classe </a:t>
+            </a:r>
+            <a:r>
+              <a:rPr lang="it-IT" dirty="0" err="1"/>
+              <a:t>HashMap</a:t>
+            </a:r>
+            <a:r>
+              <a:rPr lang="it-IT" dirty="0"/>
+              <a:t> e i Metodi put() e </a:t>
+            </a:r>
+            <a:r>
+              <a:rPr lang="it-IT" dirty="0" err="1"/>
+              <a:t>get</a:t>
+            </a:r>
+            <a:r>
+              <a:rPr lang="it-IT" dirty="0"/>
+              <a:t>()</a:t>
+            </a:r>
+          </a:p>
+        </p:txBody>
+      </p:sp>
+      <p:sp>
+        <p:nvSpPr>
+          <p:cNvPr id="3" name="Contenuto della lezione">
+            <a:extLst>
+              <a:ext uri="{FF2B5EF4-FFF2-40B4-BE49-F238E27FC236}">
+                <a16:creationId xmlns:a16="http://schemas.microsoft.com/office/drawing/2014/main" id="{2C64C9B1-A17F-A759-F50B-F2913E5D1B5E}"/>
+              </a:ext>
+            </a:extLst>
+          </p:cNvPr>
+          <p:cNvSpPr>
+            <a:spLocks noGrp="1"/>
+          </p:cNvSpPr>
+          <p:nvPr>
+            <p:ph idx="1"/>
+          </p:nvPr>
+        </p:nvSpPr>
+        <p:spPr>
+          <a:xfrm>
+            <a:off x="1317319" y="1589730"/>
+            <a:ext cx="9557362" cy="4803369"/>
+          </a:xfrm>
+        </p:spPr>
+        <p:txBody>
+          <a:bodyPr/>
+          <a:lstStyle/>
+          <a:p>
+            <a:r>
+              <a:rPr lang="it-IT" dirty="0"/>
+              <a:t>La classe concreta più celebre per implementare le mappe è </a:t>
+            </a:r>
+            <a:r>
+              <a:rPr lang="it-IT" dirty="0" err="1"/>
+              <a:t>HashMap</a:t>
+            </a:r>
+            <a:r>
+              <a:rPr lang="it-IT" dirty="0"/>
+              <a:t>, che sfrutta internamente i medesimi concetti delle tabelle </a:t>
+            </a:r>
+            <a:r>
+              <a:rPr lang="it-IT" dirty="0" err="1"/>
+              <a:t>hash</a:t>
+            </a:r>
+            <a:r>
+              <a:rPr lang="it-IT" dirty="0"/>
+              <a:t> per garantire accessi a tempo costante O(1). </a:t>
+            </a:r>
+          </a:p>
+          <a:p>
+            <a:r>
+              <a:rPr lang="it-IT" dirty="0"/>
+              <a:t>La sintassi prevede la dichiarazione dei tipi di dato sia per la chiave sia per il valore tra le parentesi angolari: </a:t>
+            </a:r>
+          </a:p>
+          <a:p>
+            <a:r>
+              <a:rPr lang="it-IT" dirty="0" err="1">
+                <a:solidFill>
+                  <a:srgbClr val="171FE2"/>
+                </a:solidFill>
+                <a:latin typeface="Consolas" panose="020B0609020204030204" pitchFamily="49" charset="0"/>
+              </a:rPr>
+              <a:t>HashMap</a:t>
+            </a:r>
+            <a:r>
+              <a:rPr lang="it-IT" dirty="0">
+                <a:solidFill>
+                  <a:srgbClr val="171FE2"/>
+                </a:solidFill>
+                <a:latin typeface="Consolas" panose="020B0609020204030204" pitchFamily="49" charset="0"/>
+              </a:rPr>
+              <a:t>&lt;</a:t>
+            </a:r>
+            <a:r>
+              <a:rPr lang="it-IT" dirty="0" err="1">
+                <a:solidFill>
+                  <a:srgbClr val="171FE2"/>
+                </a:solidFill>
+                <a:latin typeface="Consolas" panose="020B0609020204030204" pitchFamily="49" charset="0"/>
+              </a:rPr>
+              <a:t>String</a:t>
+            </a:r>
+            <a:r>
+              <a:rPr lang="it-IT" dirty="0">
+                <a:solidFill>
+                  <a:srgbClr val="171FE2"/>
+                </a:solidFill>
+                <a:latin typeface="Consolas" panose="020B0609020204030204" pitchFamily="49" charset="0"/>
+              </a:rPr>
+              <a:t>, </a:t>
+            </a:r>
+            <a:r>
+              <a:rPr lang="it-IT" dirty="0" err="1">
+                <a:solidFill>
+                  <a:srgbClr val="171FE2"/>
+                </a:solidFill>
+                <a:latin typeface="Consolas" panose="020B0609020204030204" pitchFamily="49" charset="0"/>
+              </a:rPr>
+              <a:t>ContoCorrente</a:t>
+            </a:r>
+            <a:r>
+              <a:rPr lang="it-IT" dirty="0">
+                <a:solidFill>
+                  <a:srgbClr val="171FE2"/>
+                </a:solidFill>
+                <a:latin typeface="Consolas" panose="020B0609020204030204" pitchFamily="49" charset="0"/>
+              </a:rPr>
+              <a:t>&gt; </a:t>
+            </a:r>
+            <a:r>
+              <a:rPr lang="it-IT" dirty="0" err="1">
+                <a:solidFill>
+                  <a:srgbClr val="171FE2"/>
+                </a:solidFill>
+                <a:latin typeface="Consolas" panose="020B0609020204030204" pitchFamily="49" charset="0"/>
+              </a:rPr>
+              <a:t>mappaBanca</a:t>
+            </a:r>
+            <a:r>
+              <a:rPr lang="it-IT" dirty="0">
+                <a:solidFill>
+                  <a:srgbClr val="171FE2"/>
+                </a:solidFill>
+                <a:latin typeface="Consolas" panose="020B0609020204030204" pitchFamily="49" charset="0"/>
+              </a:rPr>
+              <a:t> = new </a:t>
+            </a:r>
+            <a:r>
+              <a:rPr lang="it-IT" dirty="0" err="1">
+                <a:solidFill>
+                  <a:srgbClr val="171FE2"/>
+                </a:solidFill>
+                <a:latin typeface="Consolas" panose="020B0609020204030204" pitchFamily="49" charset="0"/>
+              </a:rPr>
+              <a:t>HashMap</a:t>
+            </a:r>
+            <a:r>
+              <a:rPr lang="it-IT" dirty="0">
+                <a:solidFill>
+                  <a:srgbClr val="171FE2"/>
+                </a:solidFill>
+                <a:latin typeface="Consolas" panose="020B0609020204030204" pitchFamily="49" charset="0"/>
+              </a:rPr>
+              <a:t>&lt;&gt;();</a:t>
+            </a:r>
+            <a:r>
+              <a:rPr lang="it-IT" dirty="0"/>
+              <a:t>.</a:t>
+            </a:r>
+          </a:p>
+          <a:p>
+            <a:r>
+              <a:rPr lang="it-IT" dirty="0"/>
+              <a:t>Per inserire una nuova coppia o aggiornare una chiave esistente, si utilizza il metodo </a:t>
+            </a:r>
+            <a:r>
+              <a:rPr lang="it-IT" dirty="0">
+                <a:solidFill>
+                  <a:srgbClr val="171FE2"/>
+                </a:solidFill>
+                <a:latin typeface="Consolas" panose="020B0609020204030204" pitchFamily="49" charset="0"/>
+              </a:rPr>
+              <a:t>.put(chiave, valore)</a:t>
+            </a:r>
+            <a:r>
+              <a:rPr lang="it-IT" dirty="0"/>
+              <a:t>. </a:t>
+            </a:r>
+          </a:p>
+          <a:p>
+            <a:r>
+              <a:rPr lang="it-IT" dirty="0"/>
+              <a:t>Per recuperare un valore memorizzato conoscendo la sua chiave, si utilizza il metodo </a:t>
+            </a:r>
+            <a:r>
+              <a:rPr lang="it-IT" dirty="0">
+                <a:solidFill>
+                  <a:srgbClr val="171FE2"/>
+                </a:solidFill>
+                <a:latin typeface="Consolas" panose="020B0609020204030204" pitchFamily="49" charset="0"/>
+              </a:rPr>
+              <a:t>.</a:t>
+            </a:r>
+            <a:r>
+              <a:rPr lang="it-IT" dirty="0" err="1">
+                <a:solidFill>
+                  <a:srgbClr val="171FE2"/>
+                </a:solidFill>
+                <a:latin typeface="Consolas" panose="020B0609020204030204" pitchFamily="49" charset="0"/>
+              </a:rPr>
+              <a:t>get</a:t>
+            </a:r>
+            <a:r>
+              <a:rPr lang="it-IT" dirty="0">
+                <a:solidFill>
+                  <a:srgbClr val="171FE2"/>
+                </a:solidFill>
+                <a:latin typeface="Consolas" panose="020B0609020204030204" pitchFamily="49" charset="0"/>
+              </a:rPr>
+              <a:t>(chiave)</a:t>
+            </a:r>
+            <a:r>
+              <a:rPr lang="it-IT" dirty="0"/>
+              <a:t>. </a:t>
+            </a:r>
+          </a:p>
+          <a:p>
+            <a:r>
+              <a:rPr lang="it-IT" dirty="0"/>
+              <a:t>Se la chiave passata come argomento non esiste all'interno della mappa, il metodo </a:t>
+            </a:r>
+            <a:r>
+              <a:rPr lang="it-IT" dirty="0" err="1"/>
+              <a:t>get</a:t>
+            </a:r>
+            <a:r>
+              <a:rPr lang="it-IT" dirty="0"/>
+              <a:t> restituirà il valore </a:t>
+            </a:r>
+            <a:r>
+              <a:rPr lang="it-IT" dirty="0" err="1"/>
+              <a:t>null</a:t>
+            </a:r>
+            <a:r>
+              <a:rPr lang="it-IT" dirty="0"/>
+              <a:t>. </a:t>
+            </a:r>
+          </a:p>
+          <a:p>
+            <a:r>
+              <a:rPr lang="it-IT" dirty="0"/>
+              <a:t>Sviluppate l'abilità pratica inserendo in una mappa tre codici prodotto associati al rispettivo prezzo decimale ed estraete un prezzo digitando il codice da tastiera.</a:t>
+            </a:r>
+            <a:endParaRPr lang="it-IT" dirty="0">
+              <a:solidFill>
+                <a:srgbClr val="171FE2"/>
+              </a:solidFill>
+              <a:latin typeface="Consolas" panose="020B0609020204030204" pitchFamily="49" charset="0"/>
+            </a:endParaRPr>
+          </a:p>
+        </p:txBody>
+      </p:sp>
+    </p:spTree>
+    <p:extLst>
+      <p:ext uri="{BB962C8B-B14F-4D97-AF65-F5344CB8AC3E}">
+        <p14:creationId xmlns:p14="http://schemas.microsoft.com/office/powerpoint/2010/main" val="2445746060"/>
+      </p:ext>
+    </p:extLst>
+  </p:cSld>
+  <p:clrMapOvr>
+    <a:masterClrMapping/>
+  </p:clrMapOvr>
+</p:sld>
+</file>
+
+<file path=ppt/slides/slide25.xml><?xml version="1.0" encoding="utf-8"?>
+<p:sld xmlns:a="http://schemas.openxmlformats.org/drawingml/2006/main" xmlns:r="http://schemas.openxmlformats.org/officeDocument/2006/relationships" xmlns:p="http://schemas.openxmlformats.org/presentationml/2006/main">
+  <p:cSld>
+    <p:spTree>
+      <p:nvGrpSpPr>
+        <p:cNvPr id="1" name="">
+          <a:extLst>
+            <a:ext uri="{FF2B5EF4-FFF2-40B4-BE49-F238E27FC236}">
+              <a16:creationId xmlns:a16="http://schemas.microsoft.com/office/drawing/2014/main" id="{C97ED299-84B5-A3A4-D3C9-2B6316B62206}"/>
+            </a:ext>
+          </a:extLst>
+        </p:cNvPr>
+        <p:cNvGrpSpPr/>
+        <p:nvPr/>
+      </p:nvGrpSpPr>
+      <p:grpSpPr>
+        <a:xfrm>
+          <a:off x="0" y="0"/>
+          <a:ext cx="0" cy="0"/>
+          <a:chOff x="0" y="0"/>
+          <a:chExt cx="0" cy="0"/>
+        </a:xfrm>
+      </p:grpSpPr>
+      <p:sp>
+        <p:nvSpPr>
+          <p:cNvPr id="2" name="Titolo della lezione">
+            <a:extLst>
+              <a:ext uri="{FF2B5EF4-FFF2-40B4-BE49-F238E27FC236}">
+                <a16:creationId xmlns:a16="http://schemas.microsoft.com/office/drawing/2014/main" id="{6A9165D7-9C51-11AD-3D15-AA79B0770ACF}"/>
+              </a:ext>
+            </a:extLst>
+          </p:cNvPr>
+          <p:cNvSpPr>
+            <a:spLocks noGrp="1"/>
+          </p:cNvSpPr>
+          <p:nvPr>
+            <p:ph type="title"/>
+          </p:nvPr>
+        </p:nvSpPr>
+        <p:spPr>
+          <a:xfrm>
+            <a:off x="838200" y="831206"/>
+            <a:ext cx="10515600" cy="314198"/>
+          </a:xfrm>
+        </p:spPr>
+        <p:txBody>
+          <a:bodyPr/>
+          <a:lstStyle/>
+          <a:p>
+            <a:r>
+              <a:rPr lang="it-IT" dirty="0"/>
+              <a:t>SLIDE 23: Esplorazione delle Mappe: </a:t>
+            </a:r>
+            <a:r>
+              <a:rPr lang="it-IT" dirty="0" err="1"/>
+              <a:t>keySet</a:t>
+            </a:r>
+            <a:r>
+              <a:rPr lang="it-IT" dirty="0"/>
+              <a:t>() e </a:t>
+            </a:r>
+            <a:r>
+              <a:rPr lang="it-IT" dirty="0" err="1"/>
+              <a:t>values</a:t>
+            </a:r>
+            <a:r>
+              <a:rPr lang="it-IT" dirty="0"/>
+              <a:t>()</a:t>
+            </a:r>
+          </a:p>
+        </p:txBody>
+      </p:sp>
+      <p:sp>
+        <p:nvSpPr>
+          <p:cNvPr id="3" name="Contenuto della lezione">
+            <a:extLst>
+              <a:ext uri="{FF2B5EF4-FFF2-40B4-BE49-F238E27FC236}">
+                <a16:creationId xmlns:a16="http://schemas.microsoft.com/office/drawing/2014/main" id="{00DD8DB7-5A94-7885-2C0E-02536444C990}"/>
+              </a:ext>
+            </a:extLst>
+          </p:cNvPr>
+          <p:cNvSpPr>
+            <a:spLocks noGrp="1"/>
+          </p:cNvSpPr>
+          <p:nvPr>
+            <p:ph idx="1"/>
+          </p:nvPr>
+        </p:nvSpPr>
+        <p:spPr>
+          <a:xfrm>
+            <a:off x="1317319" y="1589730"/>
+            <a:ext cx="9557362" cy="4803369"/>
+          </a:xfrm>
+        </p:spPr>
+        <p:txBody>
+          <a:bodyPr/>
+          <a:lstStyle/>
+          <a:p>
+            <a:r>
+              <a:rPr lang="it-IT" dirty="0"/>
+              <a:t>A causa della sua natura bidimensionale (coppie di dati), una mappa non può essere </a:t>
+            </a:r>
+            <a:r>
+              <a:rPr lang="it-IT" dirty="0" err="1"/>
+              <a:t>ciclata</a:t>
+            </a:r>
+            <a:r>
+              <a:rPr lang="it-IT" dirty="0"/>
+              <a:t> direttamente con un semplice ciclo for-</a:t>
+            </a:r>
+            <a:r>
+              <a:rPr lang="it-IT" dirty="0" err="1"/>
+              <a:t>each</a:t>
+            </a:r>
+            <a:r>
+              <a:rPr lang="it-IT" dirty="0"/>
+              <a:t>. </a:t>
+            </a:r>
+          </a:p>
+          <a:p>
+            <a:r>
+              <a:rPr lang="it-IT" dirty="0"/>
+              <a:t>Per poter scansionare i dati interni, l' </a:t>
+            </a:r>
+            <a:r>
+              <a:rPr lang="it-IT" dirty="0" err="1"/>
+              <a:t>HashMap</a:t>
+            </a:r>
+            <a:r>
+              <a:rPr lang="it-IT" dirty="0"/>
+              <a:t> mette a disposizione metodi speciali che convertono parti della mappa in collezioni tradizionali. </a:t>
+            </a:r>
+          </a:p>
+          <a:p>
+            <a:r>
+              <a:rPr lang="it-IT" dirty="0">
+                <a:solidFill>
+                  <a:srgbClr val="171FE2"/>
+                </a:solidFill>
+              </a:rPr>
+              <a:t>Il metodo </a:t>
+            </a:r>
+            <a:r>
+              <a:rPr lang="it-IT" dirty="0">
+                <a:solidFill>
+                  <a:srgbClr val="171FE2"/>
+                </a:solidFill>
+                <a:latin typeface="Consolas" panose="020B0609020204030204" pitchFamily="49" charset="0"/>
+              </a:rPr>
+              <a:t>.</a:t>
+            </a:r>
+            <a:r>
+              <a:rPr lang="it-IT" dirty="0" err="1">
+                <a:solidFill>
+                  <a:srgbClr val="171FE2"/>
+                </a:solidFill>
+                <a:latin typeface="Consolas" panose="020B0609020204030204" pitchFamily="49" charset="0"/>
+              </a:rPr>
+              <a:t>keySet</a:t>
+            </a:r>
+            <a:r>
+              <a:rPr lang="it-IT" dirty="0">
+                <a:solidFill>
+                  <a:srgbClr val="171FE2"/>
+                </a:solidFill>
+                <a:latin typeface="Consolas" panose="020B0609020204030204" pitchFamily="49" charset="0"/>
+              </a:rPr>
+              <a:t>() </a:t>
+            </a:r>
+            <a:r>
+              <a:rPr lang="it-IT" dirty="0">
+                <a:solidFill>
+                  <a:srgbClr val="171FE2"/>
+                </a:solidFill>
+              </a:rPr>
+              <a:t>estrae tutte le chiavi presenti nella mappa e le restituisce sotto forma di un'interfaccia Set (essendo le chiavi uniche per definizione). </a:t>
+            </a:r>
+          </a:p>
+          <a:p>
+            <a:r>
+              <a:rPr lang="it-IT" dirty="0"/>
+              <a:t>Il metodo </a:t>
+            </a:r>
+            <a:r>
+              <a:rPr lang="it-IT" dirty="0">
+                <a:solidFill>
+                  <a:srgbClr val="171FE2"/>
+                </a:solidFill>
+                <a:latin typeface="Consolas" panose="020B0609020204030204" pitchFamily="49" charset="0"/>
+              </a:rPr>
+              <a:t>.</a:t>
+            </a:r>
+            <a:r>
+              <a:rPr lang="it-IT" dirty="0" err="1">
+                <a:solidFill>
+                  <a:srgbClr val="171FE2"/>
+                </a:solidFill>
+                <a:latin typeface="Consolas" panose="020B0609020204030204" pitchFamily="49" charset="0"/>
+              </a:rPr>
+              <a:t>values</a:t>
+            </a:r>
+            <a:r>
+              <a:rPr lang="it-IT" dirty="0">
+                <a:solidFill>
+                  <a:srgbClr val="171FE2"/>
+                </a:solidFill>
+                <a:latin typeface="Consolas" panose="020B0609020204030204" pitchFamily="49" charset="0"/>
+              </a:rPr>
+              <a:t>()</a:t>
+            </a:r>
+            <a:r>
+              <a:rPr lang="it-IT" dirty="0"/>
+              <a:t>, invece, raccoglie tutti i valori inseriti nella mappa e li restituisce all'interno di una Collection generica. </a:t>
+            </a:r>
+          </a:p>
+          <a:p>
+            <a:r>
+              <a:rPr lang="it-IT" dirty="0"/>
+              <a:t>Combinando questi strumenti, possiamo avviare un ciclo for-</a:t>
+            </a:r>
+            <a:r>
+              <a:rPr lang="it-IT" dirty="0" err="1"/>
+              <a:t>each</a:t>
+            </a:r>
+            <a:r>
+              <a:rPr lang="it-IT" dirty="0"/>
+              <a:t> che itera sul Set delle chiavi e, all'interno del corpo del ciclo, utilizza il metodo .</a:t>
+            </a:r>
+            <a:r>
+              <a:rPr lang="it-IT" dirty="0" err="1"/>
+              <a:t>get</a:t>
+            </a:r>
+            <a:r>
+              <a:rPr lang="it-IT" dirty="0"/>
+              <a:t>(chiave) per estrarre e stampare in sequenza ordinata tutti i valori associati presenti in memoria.</a:t>
+            </a:r>
+            <a:endParaRPr lang="it-IT" dirty="0">
+              <a:solidFill>
+                <a:srgbClr val="171FE2"/>
+              </a:solidFill>
+              <a:latin typeface="Consolas" panose="020B0609020204030204" pitchFamily="49" charset="0"/>
+            </a:endParaRPr>
+          </a:p>
+        </p:txBody>
+      </p:sp>
+    </p:spTree>
+    <p:extLst>
+      <p:ext uri="{BB962C8B-B14F-4D97-AF65-F5344CB8AC3E}">
+        <p14:creationId xmlns:p14="http://schemas.microsoft.com/office/powerpoint/2010/main" val="1218388734"/>
+      </p:ext>
+    </p:extLst>
+  </p:cSld>
+  <p:clrMapOvr>
+    <a:masterClrMapping/>
+  </p:clrMapOvr>
+</p:sld>
+</file>
+
+<file path=ppt/slides/slide26.xml><?xml version="1.0" encoding="utf-8"?>
+<p:sld xmlns:a="http://schemas.openxmlformats.org/drawingml/2006/main" xmlns:r="http://schemas.openxmlformats.org/officeDocument/2006/relationships" xmlns:p="http://schemas.openxmlformats.org/presentationml/2006/main">
+  <p:cSld>
+    <p:spTree>
+      <p:nvGrpSpPr>
+        <p:cNvPr id="1" name="">
+          <a:extLst>
+            <a:ext uri="{FF2B5EF4-FFF2-40B4-BE49-F238E27FC236}">
+              <a16:creationId xmlns:a16="http://schemas.microsoft.com/office/drawing/2014/main" id="{D92A50A2-0514-1A31-2E23-5DEED8F41529}"/>
+            </a:ext>
+          </a:extLst>
+        </p:cNvPr>
+        <p:cNvGrpSpPr/>
+        <p:nvPr/>
+      </p:nvGrpSpPr>
+      <p:grpSpPr>
+        <a:xfrm>
+          <a:off x="0" y="0"/>
+          <a:ext cx="0" cy="0"/>
+          <a:chOff x="0" y="0"/>
+          <a:chExt cx="0" cy="0"/>
+        </a:xfrm>
+      </p:grpSpPr>
+      <p:sp>
+        <p:nvSpPr>
+          <p:cNvPr id="2" name="Titolo della lezione">
+            <a:extLst>
+              <a:ext uri="{FF2B5EF4-FFF2-40B4-BE49-F238E27FC236}">
+                <a16:creationId xmlns:a16="http://schemas.microsoft.com/office/drawing/2014/main" id="{ACEE7FAE-A1E5-1EB2-509B-CA5B67B78C2E}"/>
+              </a:ext>
+            </a:extLst>
+          </p:cNvPr>
+          <p:cNvSpPr>
+            <a:spLocks noGrp="1"/>
+          </p:cNvSpPr>
+          <p:nvPr>
+            <p:ph type="title"/>
+          </p:nvPr>
+        </p:nvSpPr>
+        <p:spPr>
+          <a:xfrm>
+            <a:off x="838200" y="831206"/>
+            <a:ext cx="10515600" cy="314198"/>
+          </a:xfrm>
+        </p:spPr>
+        <p:txBody>
+          <a:bodyPr/>
+          <a:lstStyle/>
+          <a:p>
+            <a:r>
+              <a:rPr lang="it-IT" dirty="0"/>
+              <a:t>SLIDE 24: Esercizio Guidato – Creazione di un Dizionario di Contatti Telefonici</a:t>
+            </a:r>
+          </a:p>
+        </p:txBody>
+      </p:sp>
+      <p:sp>
+        <p:nvSpPr>
+          <p:cNvPr id="3" name="Contenuto della lezione">
+            <a:extLst>
+              <a:ext uri="{FF2B5EF4-FFF2-40B4-BE49-F238E27FC236}">
+                <a16:creationId xmlns:a16="http://schemas.microsoft.com/office/drawing/2014/main" id="{463F6476-D692-6E9F-2B16-716E40AEFCA7}"/>
+              </a:ext>
+            </a:extLst>
+          </p:cNvPr>
+          <p:cNvSpPr>
+            <a:spLocks noGrp="1"/>
+          </p:cNvSpPr>
+          <p:nvPr>
+            <p:ph idx="1"/>
+          </p:nvPr>
+        </p:nvSpPr>
+        <p:spPr>
+          <a:xfrm>
+            <a:off x="1317319" y="1589730"/>
+            <a:ext cx="9557362" cy="4803369"/>
+          </a:xfrm>
+        </p:spPr>
+        <p:txBody>
+          <a:bodyPr/>
+          <a:lstStyle/>
+          <a:p>
+            <a:r>
+              <a:rPr lang="it-IT" dirty="0"/>
+              <a:t>Mettiamo in pratica le conoscenze sulle mappe sviluppando un'applicazione in grado di simulare la rubrica contatti di uno smartphone. </a:t>
+            </a:r>
+          </a:p>
+          <a:p>
+            <a:r>
+              <a:rPr lang="it-IT" dirty="0"/>
+              <a:t>Dichiarate all'interno del metodo </a:t>
+            </a:r>
+            <a:r>
+              <a:rPr lang="it-IT" dirty="0" err="1"/>
+              <a:t>main</a:t>
+            </a:r>
+            <a:r>
+              <a:rPr lang="it-IT" dirty="0"/>
+              <a:t> una mappa strutturata in cui la chiave è una stringa rappresentante il nome del contatto e il valore è un intero o una stringa contenente il numero di telefono: </a:t>
+            </a:r>
+            <a:r>
+              <a:rPr lang="it-IT" dirty="0" err="1"/>
+              <a:t>HashMap</a:t>
+            </a:r>
+            <a:r>
+              <a:rPr lang="it-IT" dirty="0"/>
+              <a:t>&lt;</a:t>
+            </a:r>
+            <a:r>
+              <a:rPr lang="it-IT" dirty="0" err="1"/>
+              <a:t>String</a:t>
+            </a:r>
+            <a:r>
+              <a:rPr lang="it-IT" dirty="0"/>
+              <a:t>, </a:t>
+            </a:r>
+            <a:r>
+              <a:rPr lang="it-IT" dirty="0" err="1"/>
+              <a:t>String</a:t>
+            </a:r>
+            <a:r>
+              <a:rPr lang="it-IT" dirty="0"/>
+              <a:t>&gt; rubrica = new </a:t>
+            </a:r>
+            <a:r>
+              <a:rPr lang="it-IT" dirty="0" err="1"/>
+              <a:t>HashMap</a:t>
+            </a:r>
+            <a:r>
+              <a:rPr lang="it-IT" dirty="0"/>
+              <a:t>&lt;&gt;();.</a:t>
+            </a:r>
+          </a:p>
+          <a:p>
+            <a:r>
+              <a:rPr lang="it-IT" dirty="0"/>
+              <a:t>Popolate la mappa inserendo quattro contatti tramite il metodo put. </a:t>
+            </a:r>
+          </a:p>
+          <a:p>
+            <a:r>
+              <a:rPr lang="it-IT" dirty="0"/>
+              <a:t>Utilizzate poi il metodo .</a:t>
+            </a:r>
+            <a:r>
+              <a:rPr lang="it-IT" dirty="0" err="1"/>
+              <a:t>containsKey</a:t>
+            </a:r>
+            <a:r>
+              <a:rPr lang="it-IT" dirty="0"/>
+              <a:t>("Luigi") per verificare condizionalmente se il contatto esiste nel database: in caso positivo, estraete il numero e stampatelo a schermo; in caso negativo, inviate un avviso di errore. </a:t>
+            </a:r>
+          </a:p>
+          <a:p>
+            <a:r>
+              <a:rPr lang="it-IT" dirty="0"/>
+              <a:t>Questo esercizio consolida l'abilità di gestire l'accesso sicuro ai dati indicizzati.</a:t>
+            </a:r>
+            <a:endParaRPr lang="it-IT" dirty="0">
+              <a:solidFill>
+                <a:srgbClr val="171FE2"/>
+              </a:solidFill>
+              <a:latin typeface="Consolas" panose="020B0609020204030204" pitchFamily="49" charset="0"/>
+            </a:endParaRPr>
+          </a:p>
+        </p:txBody>
+      </p:sp>
+    </p:spTree>
+    <p:extLst>
+      <p:ext uri="{BB962C8B-B14F-4D97-AF65-F5344CB8AC3E}">
+        <p14:creationId xmlns:p14="http://schemas.microsoft.com/office/powerpoint/2010/main" val="744311134"/>
+      </p:ext>
+    </p:extLst>
+  </p:cSld>
+  <p:clrMapOvr>
+    <a:masterClrMapping/>
+  </p:clrMapOvr>
+</p:sld>
+</file>
+
+<file path=ppt/slides/slide27.xml><?xml version="1.0" encoding="utf-8"?>
+<p:sld xmlns:a="http://schemas.openxmlformats.org/drawingml/2006/main" xmlns:r="http://schemas.openxmlformats.org/officeDocument/2006/relationships" xmlns:p="http://schemas.openxmlformats.org/presentationml/2006/main">
+  <p:cSld>
+    <p:spTree>
+      <p:nvGrpSpPr>
+        <p:cNvPr id="1" name="">
+          <a:extLst>
+            <a:ext uri="{FF2B5EF4-FFF2-40B4-BE49-F238E27FC236}">
+              <a16:creationId xmlns:a16="http://schemas.microsoft.com/office/drawing/2014/main" id="{E158665E-5517-6469-F887-3BB290D09554}"/>
+            </a:ext>
+          </a:extLst>
+        </p:cNvPr>
+        <p:cNvGrpSpPr/>
+        <p:nvPr/>
+      </p:nvGrpSpPr>
+      <p:grpSpPr>
+        <a:xfrm>
+          <a:off x="0" y="0"/>
+          <a:ext cx="0" cy="0"/>
+          <a:chOff x="0" y="0"/>
+          <a:chExt cx="0" cy="0"/>
+        </a:xfrm>
+      </p:grpSpPr>
+      <p:sp>
+        <p:nvSpPr>
+          <p:cNvPr id="2" name="Titolo della lezione">
+            <a:extLst>
+              <a:ext uri="{FF2B5EF4-FFF2-40B4-BE49-F238E27FC236}">
+                <a16:creationId xmlns:a16="http://schemas.microsoft.com/office/drawing/2014/main" id="{7F1DF1D8-5E4D-6A35-68EA-468BC954A8E1}"/>
+              </a:ext>
+            </a:extLst>
+          </p:cNvPr>
+          <p:cNvSpPr>
+            <a:spLocks noGrp="1"/>
+          </p:cNvSpPr>
+          <p:nvPr>
+            <p:ph type="title"/>
+          </p:nvPr>
+        </p:nvSpPr>
+        <p:spPr>
+          <a:xfrm>
+            <a:off x="838200" y="831206"/>
+            <a:ext cx="10515600" cy="314198"/>
+          </a:xfrm>
+        </p:spPr>
+        <p:txBody>
+          <a:bodyPr/>
+          <a:lstStyle/>
+          <a:p>
+            <a:r>
+              <a:rPr lang="it-IT" dirty="0"/>
+              <a:t>SLIDE 25: La Classe </a:t>
+            </a:r>
+            <a:r>
+              <a:rPr lang="it-IT" dirty="0" err="1"/>
+              <a:t>TreeMap</a:t>
+            </a:r>
+            <a:r>
+              <a:rPr lang="it-IT" dirty="0"/>
+              <a:t> e l'Ordinamento delle Chiavi</a:t>
+            </a:r>
+          </a:p>
+        </p:txBody>
+      </p:sp>
+      <p:sp>
+        <p:nvSpPr>
+          <p:cNvPr id="3" name="Contenuto della lezione">
+            <a:extLst>
+              <a:ext uri="{FF2B5EF4-FFF2-40B4-BE49-F238E27FC236}">
+                <a16:creationId xmlns:a16="http://schemas.microsoft.com/office/drawing/2014/main" id="{C88462BF-2436-685F-B292-C9263CFA0D72}"/>
+              </a:ext>
+            </a:extLst>
+          </p:cNvPr>
+          <p:cNvSpPr>
+            <a:spLocks noGrp="1"/>
+          </p:cNvSpPr>
+          <p:nvPr>
+            <p:ph idx="1"/>
+          </p:nvPr>
+        </p:nvSpPr>
+        <p:spPr>
+          <a:xfrm>
+            <a:off x="1317319" y="1589730"/>
+            <a:ext cx="9557362" cy="4803369"/>
+          </a:xfrm>
+        </p:spPr>
+        <p:txBody>
+          <a:bodyPr/>
+          <a:lstStyle/>
+          <a:p>
+            <a:r>
+              <a:rPr lang="it-IT" dirty="0"/>
+              <a:t>Esattamente come accade per i Set, la classe </a:t>
+            </a:r>
+            <a:r>
+              <a:rPr lang="it-IT" dirty="0" err="1"/>
+              <a:t>HashMap</a:t>
+            </a:r>
+            <a:r>
+              <a:rPr lang="it-IT" dirty="0"/>
+              <a:t> standard non garantisce alcun ordine logico per le chiavi memorizzate. </a:t>
+            </a:r>
+          </a:p>
+          <a:p>
+            <a:r>
+              <a:rPr lang="it-IT" dirty="0"/>
+              <a:t>Se l'applicazione richiede che il dizionario sia costantemente ordinato in base alle chiavi, la soluzione ingegneristica corretta è l'utilizzo della classe </a:t>
+            </a:r>
+            <a:r>
+              <a:rPr lang="it-IT" dirty="0" err="1"/>
+              <a:t>TreeMap</a:t>
+            </a:r>
+            <a:r>
+              <a:rPr lang="it-IT" dirty="0"/>
+              <a:t>. </a:t>
+            </a:r>
+          </a:p>
+          <a:p>
+            <a:r>
+              <a:rPr lang="it-IT" dirty="0"/>
+              <a:t>Un </a:t>
+            </a:r>
+            <a:r>
+              <a:rPr lang="it-IT" dirty="0" err="1"/>
+              <a:t>TreeMap</a:t>
+            </a:r>
+            <a:r>
+              <a:rPr lang="it-IT" dirty="0"/>
+              <a:t> implementa l'interfaccia </a:t>
+            </a:r>
+            <a:r>
+              <a:rPr lang="it-IT" dirty="0" err="1"/>
+              <a:t>Map</a:t>
+            </a:r>
+            <a:r>
+              <a:rPr lang="it-IT" dirty="0"/>
+              <a:t> strutturando internamente i dati tramite un albero binario. Esso mantiene le chiavi costantemente e automaticamente ordinate secondo il loro ordine naturale (es. alfabetico se le chiavi sono stringhe, numerico se sono interi). </a:t>
+            </a:r>
+          </a:p>
+          <a:p>
+            <a:r>
+              <a:rPr lang="it-IT" dirty="0"/>
+              <a:t>Se stampiamo o </a:t>
+            </a:r>
+            <a:r>
+              <a:rPr lang="it-IT" dirty="0" err="1"/>
+              <a:t>cicliamo</a:t>
+            </a:r>
+            <a:r>
+              <a:rPr lang="it-IT" dirty="0"/>
+              <a:t> un </a:t>
+            </a:r>
+            <a:r>
+              <a:rPr lang="it-IT" dirty="0" err="1"/>
+              <a:t>TreeMap</a:t>
+            </a:r>
+            <a:r>
+              <a:rPr lang="it-IT" dirty="0"/>
+              <a:t> di contatti telefonici, noteremo che i nomi compariranno disposti in un perfetto ordine da elenco telefonico aziendale. Le prestazioni di inserimento e ricerca scalano a O(log N).</a:t>
+            </a:r>
+            <a:endParaRPr lang="it-IT" dirty="0">
+              <a:solidFill>
+                <a:srgbClr val="171FE2"/>
+              </a:solidFill>
+              <a:latin typeface="Consolas" panose="020B0609020204030204" pitchFamily="49" charset="0"/>
+            </a:endParaRPr>
+          </a:p>
+        </p:txBody>
+      </p:sp>
+    </p:spTree>
+    <p:extLst>
+      <p:ext uri="{BB962C8B-B14F-4D97-AF65-F5344CB8AC3E}">
+        <p14:creationId xmlns:p14="http://schemas.microsoft.com/office/powerpoint/2010/main" val="2980779487"/>
+      </p:ext>
+    </p:extLst>
+  </p:cSld>
+  <p:clrMapOvr>
+    <a:masterClrMapping/>
+  </p:clrMapOvr>
+</p:sld>
+</file>
+
+<file path=ppt/slides/slide28.xml><?xml version="1.0" encoding="utf-8"?>
+<p:sld xmlns:a="http://schemas.openxmlformats.org/drawingml/2006/main" xmlns:r="http://schemas.openxmlformats.org/officeDocument/2006/relationships" xmlns:p="http://schemas.openxmlformats.org/presentationml/2006/main">
+  <p:cSld>
+    <p:spTree>
+      <p:nvGrpSpPr>
+        <p:cNvPr id="1" name="">
+          <a:extLst>
+            <a:ext uri="{FF2B5EF4-FFF2-40B4-BE49-F238E27FC236}">
+              <a16:creationId xmlns:a16="http://schemas.microsoft.com/office/drawing/2014/main" id="{300CAB26-9063-5F40-AD55-5E4D351F4180}"/>
+            </a:ext>
+          </a:extLst>
+        </p:cNvPr>
+        <p:cNvGrpSpPr/>
+        <p:nvPr/>
+      </p:nvGrpSpPr>
+      <p:grpSpPr>
+        <a:xfrm>
+          <a:off x="0" y="0"/>
+          <a:ext cx="0" cy="0"/>
+          <a:chOff x="0" y="0"/>
+          <a:chExt cx="0" cy="0"/>
+        </a:xfrm>
+      </p:grpSpPr>
+      <p:sp>
+        <p:nvSpPr>
+          <p:cNvPr id="2" name="Titolo della lezione">
+            <a:extLst>
+              <a:ext uri="{FF2B5EF4-FFF2-40B4-BE49-F238E27FC236}">
+                <a16:creationId xmlns:a16="http://schemas.microsoft.com/office/drawing/2014/main" id="{01293C7B-C097-238C-B322-43D9B364F241}"/>
+              </a:ext>
+            </a:extLst>
+          </p:cNvPr>
+          <p:cNvSpPr>
+            <a:spLocks noGrp="1"/>
+          </p:cNvSpPr>
+          <p:nvPr>
+            <p:ph type="title"/>
+          </p:nvPr>
+        </p:nvSpPr>
+        <p:spPr>
+          <a:xfrm>
+            <a:off x="838200" y="831206"/>
+            <a:ext cx="10515600" cy="314198"/>
+          </a:xfrm>
+        </p:spPr>
+        <p:txBody>
+          <a:bodyPr/>
+          <a:lstStyle/>
+          <a:p>
+            <a:r>
+              <a:rPr lang="it-IT" dirty="0"/>
+              <a:t>SEZIONE 4: PROVA PRATICA DI VALUTAZIONE (Slide 26 - 31)</a:t>
+            </a:r>
+            <a:br>
+              <a:rPr lang="it-IT" dirty="0"/>
+            </a:br>
+            <a:r>
+              <a:rPr lang="it-IT" dirty="0"/>
+              <a:t>SLIDE 26: Unità Didattica 3 – Laboratorio Finale e Compito Autentico</a:t>
+            </a:r>
+          </a:p>
+        </p:txBody>
+      </p:sp>
+      <p:sp>
+        <p:nvSpPr>
+          <p:cNvPr id="3" name="Contenuto della lezione">
+            <a:extLst>
+              <a:ext uri="{FF2B5EF4-FFF2-40B4-BE49-F238E27FC236}">
+                <a16:creationId xmlns:a16="http://schemas.microsoft.com/office/drawing/2014/main" id="{2B90B7D0-C515-1469-9813-0C73BCE92C47}"/>
+              </a:ext>
+            </a:extLst>
+          </p:cNvPr>
+          <p:cNvSpPr>
+            <a:spLocks noGrp="1"/>
+          </p:cNvSpPr>
+          <p:nvPr>
+            <p:ph idx="1"/>
+          </p:nvPr>
+        </p:nvSpPr>
+        <p:spPr>
+          <a:xfrm>
+            <a:off x="1317319" y="1589730"/>
+            <a:ext cx="9557362" cy="4803369"/>
+          </a:xfrm>
+        </p:spPr>
+        <p:txBody>
+          <a:bodyPr/>
+          <a:lstStyle/>
+          <a:p>
+            <a:r>
+              <a:rPr lang="it-IT" dirty="0"/>
+              <a:t>Siamo giunti alla fase di verifica e validazione della micro-competenza legata all'utilizzo delle strutture dati dinamiche avanzate. </a:t>
+            </a:r>
+          </a:p>
+          <a:p>
+            <a:r>
+              <a:rPr lang="it-IT" dirty="0"/>
+              <a:t>Siete chiamati a realizzare in totale autonomia un'applicazione software </a:t>
+            </a:r>
+            <a:r>
+              <a:rPr lang="it-IT" dirty="0" err="1"/>
+              <a:t>enterprise</a:t>
+            </a:r>
+            <a:r>
+              <a:rPr lang="it-IT" dirty="0"/>
+              <a:t> per la gestione del </a:t>
+            </a:r>
+            <a:r>
+              <a:rPr lang="it-IT" dirty="0" err="1"/>
+              <a:t>backend</a:t>
+            </a:r>
+            <a:r>
+              <a:rPr lang="it-IT" dirty="0"/>
+              <a:t> di un "Sistema di Carrello e Magazzino E-Commerce". </a:t>
+            </a:r>
+          </a:p>
+          <a:p>
+            <a:r>
+              <a:rPr lang="it-IT" dirty="0"/>
+              <a:t>Il software non deve fare alcun uso di vecchi array statici. </a:t>
+            </a:r>
+          </a:p>
+          <a:p>
+            <a:r>
+              <a:rPr lang="it-IT" dirty="0"/>
+              <a:t>L'intera architettura dati deve poggiare sulle strutture del Java Collection Framework analizzate durante le lezioni. </a:t>
+            </a:r>
+          </a:p>
+          <a:p>
+            <a:r>
+              <a:rPr lang="it-IT" dirty="0"/>
+              <a:t>Questo laboratorio richiede la capacità di integrare sinergicamente liste dinamiche, insiemi per il controllo dell'unicità dei prodotti e mappe per l'indicizzazione rapida dei codici a barre, simulando la struttura architetturale di un reale applicativo aziendale distribuito.</a:t>
+            </a:r>
+            <a:endParaRPr lang="it-IT" dirty="0">
+              <a:solidFill>
+                <a:srgbClr val="171FE2"/>
+              </a:solidFill>
+              <a:latin typeface="Consolas" panose="020B0609020204030204" pitchFamily="49" charset="0"/>
+            </a:endParaRPr>
+          </a:p>
+        </p:txBody>
+      </p:sp>
+    </p:spTree>
+    <p:extLst>
+      <p:ext uri="{BB962C8B-B14F-4D97-AF65-F5344CB8AC3E}">
+        <p14:creationId xmlns:p14="http://schemas.microsoft.com/office/powerpoint/2010/main" val="3434379359"/>
+      </p:ext>
+    </p:extLst>
+  </p:cSld>
+  <p:clrMapOvr>
+    <a:masterClrMapping/>
+  </p:clrMapOvr>
+</p:sld>
+</file>
+
+<file path=ppt/slides/slide29.xml><?xml version="1.0" encoding="utf-8"?>
+<p:sld xmlns:a="http://schemas.openxmlformats.org/drawingml/2006/main" xmlns:r="http://schemas.openxmlformats.org/officeDocument/2006/relationships" xmlns:p="http://schemas.openxmlformats.org/presentationml/2006/main">
+  <p:cSld>
+    <p:spTree>
+      <p:nvGrpSpPr>
+        <p:cNvPr id="1" name="">
+          <a:extLst>
+            <a:ext uri="{FF2B5EF4-FFF2-40B4-BE49-F238E27FC236}">
+              <a16:creationId xmlns:a16="http://schemas.microsoft.com/office/drawing/2014/main" id="{D837C7A5-A2CF-8E16-57BB-8750E40CE9D8}"/>
+            </a:ext>
+          </a:extLst>
+        </p:cNvPr>
+        <p:cNvGrpSpPr/>
+        <p:nvPr/>
+      </p:nvGrpSpPr>
+      <p:grpSpPr>
+        <a:xfrm>
+          <a:off x="0" y="0"/>
+          <a:ext cx="0" cy="0"/>
+          <a:chOff x="0" y="0"/>
+          <a:chExt cx="0" cy="0"/>
+        </a:xfrm>
+      </p:grpSpPr>
+      <p:sp>
+        <p:nvSpPr>
+          <p:cNvPr id="2" name="Titolo della lezione">
+            <a:extLst>
+              <a:ext uri="{FF2B5EF4-FFF2-40B4-BE49-F238E27FC236}">
+                <a16:creationId xmlns:a16="http://schemas.microsoft.com/office/drawing/2014/main" id="{D40B792E-1AD4-DC3C-9EEC-3D1726DD96D0}"/>
+              </a:ext>
+            </a:extLst>
+          </p:cNvPr>
+          <p:cNvSpPr>
+            <a:spLocks noGrp="1"/>
+          </p:cNvSpPr>
+          <p:nvPr>
+            <p:ph type="title"/>
+          </p:nvPr>
+        </p:nvSpPr>
+        <p:spPr>
+          <a:xfrm>
+            <a:off x="838200" y="831206"/>
+            <a:ext cx="10515600" cy="314198"/>
+          </a:xfrm>
+        </p:spPr>
+        <p:txBody>
+          <a:bodyPr/>
+          <a:lstStyle/>
+          <a:p>
+            <a:r>
+              <a:rPr lang="it-IT" dirty="0"/>
+              <a:t>SLIDE 27: </a:t>
+            </a:r>
+            <a:r>
+              <a:rPr lang="it-IT" dirty="0" err="1"/>
+              <a:t>pecifiche</a:t>
+            </a:r>
+            <a:r>
+              <a:rPr lang="it-IT" dirty="0"/>
+              <a:t> della Classe Prodotto e Contratto </a:t>
+            </a:r>
+            <a:r>
+              <a:rPr lang="it-IT" dirty="0" err="1"/>
+              <a:t>Hash</a:t>
+            </a:r>
+            <a:endParaRPr lang="it-IT" dirty="0"/>
+          </a:p>
+        </p:txBody>
+      </p:sp>
+      <p:sp>
+        <p:nvSpPr>
+          <p:cNvPr id="3" name="Contenuto della lezione">
+            <a:extLst>
+              <a:ext uri="{FF2B5EF4-FFF2-40B4-BE49-F238E27FC236}">
+                <a16:creationId xmlns:a16="http://schemas.microsoft.com/office/drawing/2014/main" id="{4170C320-3D27-A08D-5C22-9FCE077B15DC}"/>
+              </a:ext>
+            </a:extLst>
+          </p:cNvPr>
+          <p:cNvSpPr>
+            <a:spLocks noGrp="1"/>
+          </p:cNvSpPr>
+          <p:nvPr>
+            <p:ph idx="1"/>
+          </p:nvPr>
+        </p:nvSpPr>
+        <p:spPr>
+          <a:xfrm>
+            <a:off x="1317319" y="1589730"/>
+            <a:ext cx="9557362" cy="4803369"/>
+          </a:xfrm>
+        </p:spPr>
+        <p:txBody>
+          <a:bodyPr/>
+          <a:lstStyle/>
+          <a:p>
+            <a:r>
+              <a:rPr lang="it-IT" dirty="0"/>
+              <a:t>Il primo requisito obbligatorio del compito autentico è lo sviluppo della classe Prodotto.</a:t>
+            </a:r>
+          </a:p>
+          <a:p>
+            <a:r>
+              <a:rPr lang="it-IT" dirty="0"/>
+              <a:t> La classe deve essere rigorosamente incapsulata e possedere tre attributi privati: </a:t>
+            </a:r>
+            <a:r>
+              <a:rPr lang="it-IT" dirty="0" err="1"/>
+              <a:t>String</a:t>
+            </a:r>
+            <a:r>
+              <a:rPr lang="it-IT" dirty="0"/>
+              <a:t> </a:t>
+            </a:r>
+            <a:r>
+              <a:rPr lang="it-IT" dirty="0" err="1"/>
+              <a:t>codiceBarre</a:t>
+            </a:r>
+            <a:r>
+              <a:rPr lang="it-IT" dirty="0"/>
+              <a:t>, </a:t>
+            </a:r>
+            <a:r>
+              <a:rPr lang="it-IT" dirty="0" err="1"/>
+              <a:t>String</a:t>
+            </a:r>
+            <a:r>
+              <a:rPr lang="it-IT" dirty="0"/>
+              <a:t> nome, e double prezzo. </a:t>
+            </a:r>
+          </a:p>
+          <a:p>
+            <a:r>
+              <a:rPr lang="it-IT" dirty="0"/>
+              <a:t>Requisiti tecnici inderogabili:</a:t>
+            </a:r>
+          </a:p>
+          <a:p>
+            <a:pPr marL="342900" indent="-342900">
+              <a:buFont typeface="+mj-lt"/>
+              <a:buAutoNum type="arabicPeriod"/>
+            </a:pPr>
+            <a:r>
+              <a:rPr lang="it-IT" dirty="0"/>
+              <a:t>Implementazione del costruttore completo e dei metodi getter e setter.</a:t>
+            </a:r>
+          </a:p>
+          <a:p>
+            <a:pPr marL="342900" indent="-342900">
+              <a:buFont typeface="+mj-lt"/>
+              <a:buAutoNum type="arabicPeriod"/>
+            </a:pPr>
+            <a:r>
+              <a:rPr lang="it-IT" dirty="0" err="1"/>
+              <a:t>Override</a:t>
+            </a:r>
+            <a:r>
+              <a:rPr lang="it-IT" dirty="0"/>
+              <a:t> accurato del metodo </a:t>
+            </a:r>
+            <a:r>
+              <a:rPr lang="it-IT" dirty="0" err="1"/>
+              <a:t>toString</a:t>
+            </a:r>
+            <a:r>
+              <a:rPr lang="it-IT" dirty="0"/>
+              <a:t>() per mostrare la scheda del prodotto formattata.</a:t>
+            </a:r>
+          </a:p>
+          <a:p>
+            <a:pPr marL="342900" indent="-342900">
+              <a:buFont typeface="+mj-lt"/>
+              <a:buAutoNum type="arabicPeriod"/>
+            </a:pPr>
+            <a:r>
+              <a:rPr lang="it-IT" dirty="0"/>
+              <a:t>Riconoscendo che il </a:t>
+            </a:r>
+            <a:r>
+              <a:rPr lang="it-IT" dirty="0" err="1"/>
+              <a:t>codiceBarre</a:t>
+            </a:r>
+            <a:r>
+              <a:rPr lang="it-IT" dirty="0"/>
+              <a:t> identifica in modo univoco un prodotto sul mercato, dovete effettuare l'</a:t>
+            </a:r>
+            <a:r>
+              <a:rPr lang="it-IT" dirty="0" err="1"/>
+              <a:t>override</a:t>
+            </a:r>
+            <a:r>
+              <a:rPr lang="it-IT" dirty="0"/>
+              <a:t> obbligatorio dei metodi </a:t>
+            </a:r>
+            <a:r>
+              <a:rPr lang="it-IT" dirty="0" err="1"/>
+              <a:t>equals</a:t>
+            </a:r>
+            <a:r>
+              <a:rPr lang="it-IT" dirty="0"/>
+              <a:t>() e </a:t>
+            </a:r>
+            <a:r>
+              <a:rPr lang="it-IT" dirty="0" err="1"/>
+              <a:t>hashCode</a:t>
+            </a:r>
+            <a:r>
+              <a:rPr lang="it-IT" dirty="0"/>
+              <a:t>(). Due oggetti prodotto devono essere considerati uguali dal sistema se e solo se possiedono lo stesso identico codice a barre, garantendo così il corretto funzionamento delle collezioni </a:t>
+            </a:r>
+            <a:r>
+              <a:rPr lang="it-IT" dirty="0" err="1"/>
+              <a:t>hash</a:t>
+            </a:r>
+            <a:r>
+              <a:rPr lang="it-IT" dirty="0"/>
+              <a:t> nello Heap.</a:t>
+            </a:r>
+          </a:p>
+        </p:txBody>
+      </p:sp>
+    </p:spTree>
+    <p:extLst>
+      <p:ext uri="{BB962C8B-B14F-4D97-AF65-F5344CB8AC3E}">
+        <p14:creationId xmlns:p14="http://schemas.microsoft.com/office/powerpoint/2010/main" val="961365572"/>
       </p:ext>
     </p:extLst>
   </p:cSld>
@@ -5269,6 +8272,771 @@
     <p:extLst>
       <p:ext uri="{BB962C8B-B14F-4D97-AF65-F5344CB8AC3E}">
         <p14:creationId xmlns:p14="http://schemas.microsoft.com/office/powerpoint/2010/main" val="3965415328"/>
+      </p:ext>
+    </p:extLst>
+  </p:cSld>
+  <p:clrMapOvr>
+    <a:masterClrMapping/>
+  </p:clrMapOvr>
+</p:sld>
+</file>
+
+<file path=ppt/slides/slide30.xml><?xml version="1.0" encoding="utf-8"?>
+<p:sld xmlns:a="http://schemas.openxmlformats.org/drawingml/2006/main" xmlns:r="http://schemas.openxmlformats.org/officeDocument/2006/relationships" xmlns:p="http://schemas.openxmlformats.org/presentationml/2006/main">
+  <p:cSld>
+    <p:spTree>
+      <p:nvGrpSpPr>
+        <p:cNvPr id="1" name="">
+          <a:extLst>
+            <a:ext uri="{FF2B5EF4-FFF2-40B4-BE49-F238E27FC236}">
+              <a16:creationId xmlns:a16="http://schemas.microsoft.com/office/drawing/2014/main" id="{9D4ABB12-B28E-B545-967A-58EE9DDE5553}"/>
+            </a:ext>
+          </a:extLst>
+        </p:cNvPr>
+        <p:cNvGrpSpPr/>
+        <p:nvPr/>
+      </p:nvGrpSpPr>
+      <p:grpSpPr>
+        <a:xfrm>
+          <a:off x="0" y="0"/>
+          <a:ext cx="0" cy="0"/>
+          <a:chOff x="0" y="0"/>
+          <a:chExt cx="0" cy="0"/>
+        </a:xfrm>
+      </p:grpSpPr>
+      <p:sp>
+        <p:nvSpPr>
+          <p:cNvPr id="2" name="Titolo della lezione">
+            <a:extLst>
+              <a:ext uri="{FF2B5EF4-FFF2-40B4-BE49-F238E27FC236}">
+                <a16:creationId xmlns:a16="http://schemas.microsoft.com/office/drawing/2014/main" id="{4A1280C8-0474-3ABE-E047-92E17FE591AE}"/>
+              </a:ext>
+            </a:extLst>
+          </p:cNvPr>
+          <p:cNvSpPr>
+            <a:spLocks noGrp="1"/>
+          </p:cNvSpPr>
+          <p:nvPr>
+            <p:ph type="title"/>
+          </p:nvPr>
+        </p:nvSpPr>
+        <p:spPr>
+          <a:xfrm>
+            <a:off x="838200" y="831206"/>
+            <a:ext cx="10515600" cy="314198"/>
+          </a:xfrm>
+        </p:spPr>
+        <p:txBody>
+          <a:bodyPr/>
+          <a:lstStyle/>
+          <a:p>
+            <a:r>
+              <a:rPr lang="it-IT" dirty="0"/>
+              <a:t>SLIDE 28: Architettura del Gestore Magazzino tramite Mappe</a:t>
+            </a:r>
+          </a:p>
+        </p:txBody>
+      </p:sp>
+      <p:sp>
+        <p:nvSpPr>
+          <p:cNvPr id="3" name="Contenuto della lezione">
+            <a:extLst>
+              <a:ext uri="{FF2B5EF4-FFF2-40B4-BE49-F238E27FC236}">
+                <a16:creationId xmlns:a16="http://schemas.microsoft.com/office/drawing/2014/main" id="{A1256D11-7F34-BCBF-3EEC-512D7467B9CC}"/>
+              </a:ext>
+            </a:extLst>
+          </p:cNvPr>
+          <p:cNvSpPr>
+            <a:spLocks noGrp="1"/>
+          </p:cNvSpPr>
+          <p:nvPr>
+            <p:ph idx="1"/>
+          </p:nvPr>
+        </p:nvSpPr>
+        <p:spPr>
+          <a:xfrm>
+            <a:off x="1317319" y="1589730"/>
+            <a:ext cx="9557362" cy="4803369"/>
+          </a:xfrm>
+        </p:spPr>
+        <p:txBody>
+          <a:bodyPr/>
+          <a:lstStyle/>
+          <a:p>
+            <a:r>
+              <a:rPr lang="it-IT" dirty="0"/>
+              <a:t>Create una classe chiamata </a:t>
+            </a:r>
+            <a:r>
+              <a:rPr lang="it-IT" dirty="0" err="1"/>
+              <a:t>GestoreMagazzino</a:t>
+            </a:r>
+            <a:r>
+              <a:rPr lang="it-IT" dirty="0"/>
+              <a:t>. Al suo interno, dichiarate come attributo privato una mappa che fungerà da database temporaneo dei prodotti disponibili nel sistema. </a:t>
+            </a:r>
+          </a:p>
+          <a:p>
+            <a:r>
+              <a:rPr lang="it-IT" dirty="0"/>
+              <a:t>La mappa deve utilizzare come chiave la stringa del codice a barre e come valore l'oggetto Prodotto associato: private </a:t>
+            </a:r>
+            <a:r>
+              <a:rPr lang="it-IT" dirty="0" err="1"/>
+              <a:t>Map</a:t>
+            </a:r>
+            <a:r>
+              <a:rPr lang="it-IT" dirty="0"/>
+              <a:t>&lt;</a:t>
+            </a:r>
+            <a:r>
+              <a:rPr lang="it-IT" dirty="0" err="1"/>
+              <a:t>String</a:t>
+            </a:r>
+            <a:r>
+              <a:rPr lang="it-IT" dirty="0"/>
+              <a:t>, Prodotto&gt; catalogo = new </a:t>
+            </a:r>
+            <a:r>
+              <a:rPr lang="it-IT" dirty="0" err="1"/>
+              <a:t>HashMap</a:t>
+            </a:r>
+            <a:r>
+              <a:rPr lang="it-IT" dirty="0"/>
+              <a:t>&lt;&gt;();. </a:t>
+            </a:r>
+          </a:p>
+          <a:p>
+            <a:r>
+              <a:rPr lang="it-IT" dirty="0"/>
+              <a:t>Sviluppate all'interno della classe due metodi operativi pubblici:</a:t>
+            </a:r>
+          </a:p>
+          <a:p>
+            <a:r>
+              <a:rPr lang="it-IT" dirty="0"/>
+              <a:t>public </a:t>
+            </a:r>
+            <a:r>
+              <a:rPr lang="it-IT" dirty="0" err="1"/>
+              <a:t>void</a:t>
+            </a:r>
+            <a:r>
+              <a:rPr lang="it-IT" dirty="0"/>
+              <a:t> </a:t>
+            </a:r>
+            <a:r>
+              <a:rPr lang="it-IT" dirty="0" err="1"/>
+              <a:t>aggiungiProdotto</a:t>
+            </a:r>
+            <a:r>
+              <a:rPr lang="it-IT" dirty="0"/>
+              <a:t>(Prodotto p): inserisce il prodotto nella mappa catalogo sfruttando il suo codice come chiave.</a:t>
+            </a:r>
+          </a:p>
+          <a:p>
+            <a:r>
+              <a:rPr lang="it-IT" dirty="0"/>
+              <a:t>public Prodotto </a:t>
+            </a:r>
+            <a:r>
+              <a:rPr lang="it-IT" dirty="0" err="1"/>
+              <a:t>cercaProdotto</a:t>
+            </a:r>
+            <a:r>
+              <a:rPr lang="it-IT" dirty="0"/>
+              <a:t>(</a:t>
+            </a:r>
+            <a:r>
+              <a:rPr lang="it-IT" dirty="0" err="1"/>
+              <a:t>String</a:t>
+            </a:r>
+            <a:r>
+              <a:rPr lang="it-IT" dirty="0"/>
+              <a:t> codice): restituisce istantaneamente l'oggetto prodotto corrispondente effettuando un accesso O(1), o restituisce </a:t>
+            </a:r>
+            <a:r>
+              <a:rPr lang="it-IT" dirty="0" err="1"/>
+              <a:t>null</a:t>
+            </a:r>
+            <a:r>
+              <a:rPr lang="it-IT" dirty="0"/>
+              <a:t> se il codice è inesistente.</a:t>
+            </a:r>
+          </a:p>
+        </p:txBody>
+      </p:sp>
+    </p:spTree>
+    <p:extLst>
+      <p:ext uri="{BB962C8B-B14F-4D97-AF65-F5344CB8AC3E}">
+        <p14:creationId xmlns:p14="http://schemas.microsoft.com/office/powerpoint/2010/main" val="2641603554"/>
+      </p:ext>
+    </p:extLst>
+  </p:cSld>
+  <p:clrMapOvr>
+    <a:masterClrMapping/>
+  </p:clrMapOvr>
+</p:sld>
+</file>
+
+<file path=ppt/slides/slide31.xml><?xml version="1.0" encoding="utf-8"?>
+<p:sld xmlns:a="http://schemas.openxmlformats.org/drawingml/2006/main" xmlns:r="http://schemas.openxmlformats.org/officeDocument/2006/relationships" xmlns:p="http://schemas.openxmlformats.org/presentationml/2006/main">
+  <p:cSld>
+    <p:spTree>
+      <p:nvGrpSpPr>
+        <p:cNvPr id="1" name="">
+          <a:extLst>
+            <a:ext uri="{FF2B5EF4-FFF2-40B4-BE49-F238E27FC236}">
+              <a16:creationId xmlns:a16="http://schemas.microsoft.com/office/drawing/2014/main" id="{0EE1DA71-068C-951B-543C-4ABF2162ACA1}"/>
+            </a:ext>
+          </a:extLst>
+        </p:cNvPr>
+        <p:cNvGrpSpPr/>
+        <p:nvPr/>
+      </p:nvGrpSpPr>
+      <p:grpSpPr>
+        <a:xfrm>
+          <a:off x="0" y="0"/>
+          <a:ext cx="0" cy="0"/>
+          <a:chOff x="0" y="0"/>
+          <a:chExt cx="0" cy="0"/>
+        </a:xfrm>
+      </p:grpSpPr>
+      <p:sp>
+        <p:nvSpPr>
+          <p:cNvPr id="2" name="Titolo della lezione">
+            <a:extLst>
+              <a:ext uri="{FF2B5EF4-FFF2-40B4-BE49-F238E27FC236}">
+                <a16:creationId xmlns:a16="http://schemas.microsoft.com/office/drawing/2014/main" id="{0A3D9F50-2EFB-0855-D7E5-6538643E30E3}"/>
+              </a:ext>
+            </a:extLst>
+          </p:cNvPr>
+          <p:cNvSpPr>
+            <a:spLocks noGrp="1"/>
+          </p:cNvSpPr>
+          <p:nvPr>
+            <p:ph type="title"/>
+          </p:nvPr>
+        </p:nvSpPr>
+        <p:spPr>
+          <a:xfrm>
+            <a:off x="838200" y="831206"/>
+            <a:ext cx="10515600" cy="314198"/>
+          </a:xfrm>
+        </p:spPr>
+        <p:txBody>
+          <a:bodyPr/>
+          <a:lstStyle/>
+          <a:p>
+            <a:r>
+              <a:rPr lang="it-IT" dirty="0"/>
+              <a:t>SLIDE 29: Modellazione del Carrello Spesa tramite </a:t>
+            </a:r>
+            <a:r>
+              <a:rPr lang="it-IT" dirty="0" err="1"/>
+              <a:t>ArrayList</a:t>
+            </a:r>
+            <a:endParaRPr lang="it-IT" dirty="0"/>
+          </a:p>
+        </p:txBody>
+      </p:sp>
+      <p:sp>
+        <p:nvSpPr>
+          <p:cNvPr id="3" name="Contenuto della lezione">
+            <a:extLst>
+              <a:ext uri="{FF2B5EF4-FFF2-40B4-BE49-F238E27FC236}">
+                <a16:creationId xmlns:a16="http://schemas.microsoft.com/office/drawing/2014/main" id="{D02A6AA7-97BA-4575-AA7D-C47F32FBD57F}"/>
+              </a:ext>
+            </a:extLst>
+          </p:cNvPr>
+          <p:cNvSpPr>
+            <a:spLocks noGrp="1"/>
+          </p:cNvSpPr>
+          <p:nvPr>
+            <p:ph idx="1"/>
+          </p:nvPr>
+        </p:nvSpPr>
+        <p:spPr>
+          <a:xfrm>
+            <a:off x="1317319" y="1589730"/>
+            <a:ext cx="9557362" cy="4803369"/>
+          </a:xfrm>
+        </p:spPr>
+        <p:txBody>
+          <a:bodyPr/>
+          <a:lstStyle/>
+          <a:p>
+            <a:r>
+              <a:rPr lang="it-IT" dirty="0"/>
+              <a:t>Create una terza classe chiamata </a:t>
+            </a:r>
+            <a:r>
+              <a:rPr lang="it-IT" dirty="0" err="1"/>
+              <a:t>CarrelloSpesa</a:t>
+            </a:r>
+            <a:r>
+              <a:rPr lang="it-IT" dirty="0"/>
+              <a:t>. </a:t>
+            </a:r>
+          </a:p>
+          <a:p>
+            <a:r>
+              <a:rPr lang="it-IT" dirty="0"/>
+              <a:t>Il carrello deve memorizzare la sequenza di prodotti scelti dall'utente durante la sessione di acquisto virtuale. </a:t>
+            </a:r>
+          </a:p>
+          <a:p>
+            <a:r>
+              <a:rPr lang="it-IT" dirty="0"/>
+              <a:t>Trattandosi di una struttura in cui l'utente può inserire più volte lo stesso articolo e in cui conta l'ordine di selezione, la scelta tecnologica corretta è l'uso di una lista. </a:t>
+            </a:r>
+          </a:p>
+          <a:p>
+            <a:r>
+              <a:rPr lang="it-IT" dirty="0"/>
+              <a:t>Dichiarate come attributo privato: private List&lt;Prodotto&gt; articoli = new </a:t>
+            </a:r>
+            <a:r>
+              <a:rPr lang="it-IT" dirty="0" err="1"/>
+              <a:t>ArrayList</a:t>
+            </a:r>
+            <a:r>
+              <a:rPr lang="it-IT" dirty="0"/>
+              <a:t>&lt;&gt;();. </a:t>
+            </a:r>
+          </a:p>
+          <a:p>
+            <a:r>
+              <a:rPr lang="it-IT" dirty="0"/>
+              <a:t>Sviluppate i metodi pubblici: public </a:t>
+            </a:r>
+            <a:r>
+              <a:rPr lang="it-IT" dirty="0" err="1"/>
+              <a:t>void</a:t>
+            </a:r>
+            <a:r>
+              <a:rPr lang="it-IT" dirty="0"/>
+              <a:t> </a:t>
+            </a:r>
+            <a:r>
+              <a:rPr lang="it-IT" dirty="0" err="1"/>
+              <a:t>aggiungiArticolo</a:t>
+            </a:r>
+            <a:r>
+              <a:rPr lang="it-IT" dirty="0"/>
+              <a:t>(Prodotto p) per inserire l'elemento nella lista, e public double </a:t>
+            </a:r>
+            <a:r>
+              <a:rPr lang="it-IT" dirty="0" err="1"/>
+              <a:t>calcolaTotale</a:t>
+            </a:r>
+            <a:r>
+              <a:rPr lang="it-IT" dirty="0"/>
+              <a:t>() che, tramite un ciclo for-</a:t>
+            </a:r>
+            <a:r>
+              <a:rPr lang="it-IT" dirty="0" err="1"/>
+              <a:t>each</a:t>
+            </a:r>
+            <a:r>
+              <a:rPr lang="it-IT" dirty="0"/>
+              <a:t>, scorra l'intera lista dinamica, estragga i prezzi di ciascun articolo accumulandoli in una variabile locale e restituisca il costo complessivo del carrello.</a:t>
+            </a:r>
+          </a:p>
+        </p:txBody>
+      </p:sp>
+    </p:spTree>
+    <p:extLst>
+      <p:ext uri="{BB962C8B-B14F-4D97-AF65-F5344CB8AC3E}">
+        <p14:creationId xmlns:p14="http://schemas.microsoft.com/office/powerpoint/2010/main" val="739808682"/>
+      </p:ext>
+    </p:extLst>
+  </p:cSld>
+  <p:clrMapOvr>
+    <a:masterClrMapping/>
+  </p:clrMapOvr>
+</p:sld>
+</file>
+
+<file path=ppt/slides/slide32.xml><?xml version="1.0" encoding="utf-8"?>
+<p:sld xmlns:a="http://schemas.openxmlformats.org/drawingml/2006/main" xmlns:r="http://schemas.openxmlformats.org/officeDocument/2006/relationships" xmlns:p="http://schemas.openxmlformats.org/presentationml/2006/main">
+  <p:cSld>
+    <p:spTree>
+      <p:nvGrpSpPr>
+        <p:cNvPr id="1" name="">
+          <a:extLst>
+            <a:ext uri="{FF2B5EF4-FFF2-40B4-BE49-F238E27FC236}">
+              <a16:creationId xmlns:a16="http://schemas.microsoft.com/office/drawing/2014/main" id="{79D93761-B92F-E522-F5BC-9B5CB979DC00}"/>
+            </a:ext>
+          </a:extLst>
+        </p:cNvPr>
+        <p:cNvGrpSpPr/>
+        <p:nvPr/>
+      </p:nvGrpSpPr>
+      <p:grpSpPr>
+        <a:xfrm>
+          <a:off x="0" y="0"/>
+          <a:ext cx="0" cy="0"/>
+          <a:chOff x="0" y="0"/>
+          <a:chExt cx="0" cy="0"/>
+        </a:xfrm>
+      </p:grpSpPr>
+      <p:sp>
+        <p:nvSpPr>
+          <p:cNvPr id="2" name="Titolo della lezione">
+            <a:extLst>
+              <a:ext uri="{FF2B5EF4-FFF2-40B4-BE49-F238E27FC236}">
+                <a16:creationId xmlns:a16="http://schemas.microsoft.com/office/drawing/2014/main" id="{BB2CDA2E-5FA6-45E1-2DEB-FD8786B71B9D}"/>
+              </a:ext>
+            </a:extLst>
+          </p:cNvPr>
+          <p:cNvSpPr>
+            <a:spLocks noGrp="1"/>
+          </p:cNvSpPr>
+          <p:nvPr>
+            <p:ph type="title"/>
+          </p:nvPr>
+        </p:nvSpPr>
+        <p:spPr>
+          <a:xfrm>
+            <a:off x="838200" y="831206"/>
+            <a:ext cx="10515600" cy="314198"/>
+          </a:xfrm>
+        </p:spPr>
+        <p:txBody>
+          <a:bodyPr/>
+          <a:lstStyle/>
+          <a:p>
+            <a:r>
+              <a:rPr lang="it-IT" dirty="0"/>
+              <a:t>SLIDE 30: Flusso nel Metodo </a:t>
+            </a:r>
+            <a:r>
+              <a:rPr lang="it-IT" dirty="0" err="1"/>
+              <a:t>Main</a:t>
+            </a:r>
+            <a:r>
+              <a:rPr lang="it-IT" dirty="0"/>
+              <a:t> e Criteri di Qualità</a:t>
+            </a:r>
+          </a:p>
+        </p:txBody>
+      </p:sp>
+      <p:sp>
+        <p:nvSpPr>
+          <p:cNvPr id="3" name="Contenuto della lezione">
+            <a:extLst>
+              <a:ext uri="{FF2B5EF4-FFF2-40B4-BE49-F238E27FC236}">
+                <a16:creationId xmlns:a16="http://schemas.microsoft.com/office/drawing/2014/main" id="{FDB8B1DB-CFFA-AC1B-68E7-1B145FB404DA}"/>
+              </a:ext>
+            </a:extLst>
+          </p:cNvPr>
+          <p:cNvSpPr>
+            <a:spLocks noGrp="1"/>
+          </p:cNvSpPr>
+          <p:nvPr>
+            <p:ph idx="1"/>
+          </p:nvPr>
+        </p:nvSpPr>
+        <p:spPr>
+          <a:xfrm>
+            <a:off x="1317319" y="1589730"/>
+            <a:ext cx="9557362" cy="4803369"/>
+          </a:xfrm>
+        </p:spPr>
+        <p:txBody>
+          <a:bodyPr/>
+          <a:lstStyle/>
+          <a:p>
+            <a:r>
+              <a:rPr lang="it-IT" dirty="0"/>
+              <a:t>All'interno della classe principale contenente il metodo </a:t>
+            </a:r>
+            <a:r>
+              <a:rPr lang="it-IT" dirty="0" err="1"/>
+              <a:t>main</a:t>
+            </a:r>
+            <a:r>
+              <a:rPr lang="it-IT" dirty="0"/>
+              <a:t>, orchestrate l'intero flusso dell'applicazione. </a:t>
+            </a:r>
+          </a:p>
+          <a:p>
+            <a:r>
+              <a:rPr lang="it-IT" dirty="0"/>
+              <a:t>Create il magazzino, popolatelo inserendo tre prodotti reali e simulate un utente che digita un codice a barre. </a:t>
+            </a:r>
+          </a:p>
+          <a:p>
+            <a:r>
+              <a:rPr lang="it-IT" dirty="0"/>
+              <a:t>Il programma verificherà la presenza dell'articolo nel catalogo tramite il metodo di ricerca e, in caso positivo, lo sposterà dentro l'oggetto carrello dell'utente. </a:t>
+            </a:r>
+          </a:p>
+          <a:p>
+            <a:r>
+              <a:rPr lang="it-IT"/>
+              <a:t>Al </a:t>
+            </a:r>
+            <a:r>
+              <a:rPr lang="it-IT" dirty="0"/>
+              <a:t>termine, stampate il report completo degli acquisti e il totale economico dovuto</a:t>
+            </a:r>
+            <a:r>
+              <a:rPr lang="it-IT"/>
+              <a:t>. </a:t>
+            </a:r>
+          </a:p>
+          <a:p>
+            <a:r>
+              <a:rPr lang="it-IT"/>
+              <a:t>I </a:t>
+            </a:r>
+            <a:r>
+              <a:rPr lang="it-IT" dirty="0"/>
+              <a:t>criteri di valutazione per il rilascio della micro-credenziale verificheranno: l'appropriatezza della scelta della struttura dati per ciascun compito (Magazzino vs Carrello), la corretta implementazione della coppia </a:t>
+            </a:r>
+            <a:r>
+              <a:rPr lang="it-IT" dirty="0" err="1"/>
+              <a:t>equals</a:t>
+            </a:r>
+            <a:r>
+              <a:rPr lang="it-IT" dirty="0"/>
+              <a:t>/</a:t>
+            </a:r>
+            <a:r>
+              <a:rPr lang="it-IT" dirty="0" err="1"/>
+              <a:t>hashCode</a:t>
+            </a:r>
+            <a:r>
+              <a:rPr lang="it-IT" dirty="0"/>
+              <a:t> e la pulizia sintattica nell'uso dei </a:t>
+            </a:r>
+            <a:r>
+              <a:rPr lang="it-IT" dirty="0" err="1"/>
+              <a:t>Generics</a:t>
+            </a:r>
+            <a:r>
+              <a:rPr lang="it-IT" dirty="0"/>
+              <a:t>.</a:t>
+            </a:r>
+          </a:p>
+        </p:txBody>
+      </p:sp>
+    </p:spTree>
+    <p:extLst>
+      <p:ext uri="{BB962C8B-B14F-4D97-AF65-F5344CB8AC3E}">
+        <p14:creationId xmlns:p14="http://schemas.microsoft.com/office/powerpoint/2010/main" val="967221395"/>
+      </p:ext>
+    </p:extLst>
+  </p:cSld>
+  <p:clrMapOvr>
+    <a:masterClrMapping/>
+  </p:clrMapOvr>
+</p:sld>
+</file>
+
+<file path=ppt/slides/slide33.xml><?xml version="1.0" encoding="utf-8"?>
+<p:sld xmlns:a="http://schemas.openxmlformats.org/drawingml/2006/main" xmlns:r="http://schemas.openxmlformats.org/officeDocument/2006/relationships" xmlns:p="http://schemas.openxmlformats.org/presentationml/2006/main">
+  <p:cSld>
+    <p:spTree>
+      <p:nvGrpSpPr>
+        <p:cNvPr id="1" name="">
+          <a:extLst>
+            <a:ext uri="{FF2B5EF4-FFF2-40B4-BE49-F238E27FC236}">
+              <a16:creationId xmlns:a16="http://schemas.microsoft.com/office/drawing/2014/main" id="{56121D2E-15CF-F034-55CA-BF9BCE0415DC}"/>
+            </a:ext>
+          </a:extLst>
+        </p:cNvPr>
+        <p:cNvGrpSpPr/>
+        <p:nvPr/>
+      </p:nvGrpSpPr>
+      <p:grpSpPr>
+        <a:xfrm>
+          <a:off x="0" y="0"/>
+          <a:ext cx="0" cy="0"/>
+          <a:chOff x="0" y="0"/>
+          <a:chExt cx="0" cy="0"/>
+        </a:xfrm>
+      </p:grpSpPr>
+      <p:sp>
+        <p:nvSpPr>
+          <p:cNvPr id="2" name="Titolo della lezione">
+            <a:extLst>
+              <a:ext uri="{FF2B5EF4-FFF2-40B4-BE49-F238E27FC236}">
+                <a16:creationId xmlns:a16="http://schemas.microsoft.com/office/drawing/2014/main" id="{96663EEB-8D78-DA76-A3D8-512AFB95B570}"/>
+              </a:ext>
+            </a:extLst>
+          </p:cNvPr>
+          <p:cNvSpPr>
+            <a:spLocks noGrp="1"/>
+          </p:cNvSpPr>
+          <p:nvPr>
+            <p:ph type="title"/>
+          </p:nvPr>
+        </p:nvSpPr>
+        <p:spPr>
+          <a:xfrm>
+            <a:off x="838200" y="831206"/>
+            <a:ext cx="10515600" cy="314198"/>
+          </a:xfrm>
+        </p:spPr>
+        <p:txBody>
+          <a:bodyPr/>
+          <a:lstStyle/>
+          <a:p>
+            <a:r>
+              <a:rPr lang="it-IT" dirty="0"/>
+              <a:t>SLIDE 31: Conclusione del Percorso e Certificazione delle Competenze</a:t>
+            </a:r>
+          </a:p>
+        </p:txBody>
+      </p:sp>
+      <p:sp>
+        <p:nvSpPr>
+          <p:cNvPr id="3" name="Contenuto della lezione">
+            <a:extLst>
+              <a:ext uri="{FF2B5EF4-FFF2-40B4-BE49-F238E27FC236}">
+                <a16:creationId xmlns:a16="http://schemas.microsoft.com/office/drawing/2014/main" id="{9156409E-213B-6EE4-4D87-CC30A0993171}"/>
+              </a:ext>
+            </a:extLst>
+          </p:cNvPr>
+          <p:cNvSpPr>
+            <a:spLocks noGrp="1"/>
+          </p:cNvSpPr>
+          <p:nvPr>
+            <p:ph idx="1"/>
+          </p:nvPr>
+        </p:nvSpPr>
+        <p:spPr>
+          <a:xfrm>
+            <a:off x="1317319" y="1589730"/>
+            <a:ext cx="9557362" cy="4803369"/>
+          </a:xfrm>
+        </p:spPr>
+        <p:txBody>
+          <a:bodyPr/>
+          <a:lstStyle/>
+          <a:p>
+            <a:r>
+              <a:rPr lang="it-IT" dirty="0"/>
+              <a:t>Complimenti per aver completato con successo il modulo formativo SF03PR04 focalizzato sul Java Collection Framework. </a:t>
+            </a:r>
+          </a:p>
+          <a:p>
+            <a:r>
+              <a:rPr lang="it-IT" dirty="0"/>
+              <a:t>Con l'acquisizione di questa competenza architetturale avanzata, avete completato il nucleo fondamentale della programmazione Java standard richiesta a un diplomato degli Istituti Tecnici industriali. </a:t>
+            </a:r>
+          </a:p>
+          <a:p>
+            <a:r>
+              <a:rPr lang="it-IT" dirty="0"/>
+              <a:t>Siete ora in grado di progettare software professionali capaci di manipolare moli massive di dati in memoria RAM con la massima efficienza algoritmica e pulizia del codice. </a:t>
+            </a:r>
+          </a:p>
+          <a:p>
+            <a:r>
+              <a:rPr lang="it-IT" dirty="0"/>
+              <a:t>Questa solida base ingegneristica rappresenta il trampolino di lancio ideale per esplorare in autonomia o nei percorsi successivi i framework industriali </a:t>
+            </a:r>
+            <a:r>
+              <a:rPr lang="it-IT" dirty="0" err="1"/>
+              <a:t>enterprise</a:t>
+            </a:r>
+            <a:r>
+              <a:rPr lang="it-IT" dirty="0"/>
+              <a:t> (come Spring Boot o </a:t>
+            </a:r>
+            <a:r>
+              <a:rPr lang="it-IT" dirty="0" err="1"/>
+              <a:t>Hibernate</a:t>
+            </a:r>
+            <a:r>
+              <a:rPr lang="it-IT" dirty="0"/>
+              <a:t>) e lo sviluppo di applicazioni web complesse connesse a database relazionali reali</a:t>
+            </a:r>
+            <a:r>
+              <a:rPr lang="it-IT"/>
+              <a:t>. </a:t>
+            </a:r>
+          </a:p>
+          <a:p>
+            <a:r>
+              <a:rPr lang="it-IT"/>
+              <a:t>Buona </a:t>
+            </a:r>
+            <a:r>
+              <a:rPr lang="it-IT" dirty="0"/>
+              <a:t>fortuna per i vostri progetti futuri e continuate a programmare con passione!</a:t>
+            </a:r>
+          </a:p>
+        </p:txBody>
+      </p:sp>
+    </p:spTree>
+    <p:extLst>
+      <p:ext uri="{BB962C8B-B14F-4D97-AF65-F5344CB8AC3E}">
+        <p14:creationId xmlns:p14="http://schemas.microsoft.com/office/powerpoint/2010/main" val="3893610572"/>
+      </p:ext>
+    </p:extLst>
+  </p:cSld>
+  <p:clrMapOvr>
+    <a:masterClrMapping/>
+  </p:clrMapOvr>
+</p:sld>
+</file>
+
+<file path=ppt/slides/slide34.xml><?xml version="1.0" encoding="utf-8"?>
+<p:sld xmlns:a="http://schemas.openxmlformats.org/drawingml/2006/main" xmlns:r="http://schemas.openxmlformats.org/officeDocument/2006/relationships" xmlns:p="http://schemas.openxmlformats.org/presentationml/2006/main">
+  <p:cSld>
+    <p:spTree>
+      <p:nvGrpSpPr>
+        <p:cNvPr id="1" name=""/>
+        <p:cNvGrpSpPr/>
+        <p:nvPr/>
+      </p:nvGrpSpPr>
+      <p:grpSpPr>
+        <a:xfrm>
+          <a:off x="0" y="0"/>
+          <a:ext cx="0" cy="0"/>
+          <a:chOff x="0" y="0"/>
+          <a:chExt cx="0" cy="0"/>
+        </a:xfrm>
+      </p:grpSpPr>
+      <p:sp>
+        <p:nvSpPr>
+          <p:cNvPr id="2" name="Titolo 1">
+            <a:extLst>
+              <a:ext uri="{FF2B5EF4-FFF2-40B4-BE49-F238E27FC236}">
+                <a16:creationId xmlns:a16="http://schemas.microsoft.com/office/drawing/2014/main" id="{B5E02355-4941-9C10-CA1D-649F04DB5143}"/>
+              </a:ext>
+            </a:extLst>
+          </p:cNvPr>
+          <p:cNvSpPr>
+            <a:spLocks noGrp="1"/>
+          </p:cNvSpPr>
+          <p:nvPr>
+            <p:ph type="title"/>
+          </p:nvPr>
+        </p:nvSpPr>
+        <p:spPr/>
+        <p:txBody>
+          <a:bodyPr/>
+          <a:lstStyle/>
+          <a:p>
+            <a:r>
+              <a:rPr lang="it-IT" spc="0" dirty="0">
+                <a:latin typeface="Neue Haas Grotesk Text Pro" panose="020B0504020202020204" pitchFamily="34" charset="0"/>
+              </a:rPr>
+              <a:t>GRAZIE PER L’ATTENZIONE</a:t>
+            </a:r>
+          </a:p>
+        </p:txBody>
+      </p:sp>
+    </p:spTree>
+    <p:extLst>
+      <p:ext uri="{BB962C8B-B14F-4D97-AF65-F5344CB8AC3E}">
+        <p14:creationId xmlns:p14="http://schemas.microsoft.com/office/powerpoint/2010/main" val="3003246572"/>
       </p:ext>
     </p:extLst>
   </p:cSld>
